--- a/我要全心讚美.pptx
+++ b/我要全心讚美.pptx
@@ -168,10 +168,9 @@
           <a:lstStyle/>
           <a:p>
             <a:r>
-              <a:rPr lang="zh-TW" altLang="en-US" smtClean="0"/>
+              <a:rPr lang="zh-TW" altLang="en-US"/>
               <a:t>按一下以編輯母片標題樣式</a:t>
             </a:r>
-            <a:endParaRPr lang="zh-TW" altLang="en-US"/>
           </a:p>
         </p:txBody>
       </p:sp>
@@ -287,10 +286,9 @@
           </a:lstStyle>
           <a:p>
             <a:r>
-              <a:rPr lang="zh-TW" altLang="en-US" smtClean="0"/>
+              <a:rPr lang="zh-TW" altLang="en-US"/>
               <a:t>按一下以編輯母片副標題樣式</a:t>
             </a:r>
-            <a:endParaRPr lang="zh-TW" altLang="en-US"/>
           </a:p>
         </p:txBody>
       </p:sp>
@@ -311,7 +309,7 @@
           <a:p>
             <a:fld id="{F4DC9DE7-1299-458E-9A51-39F41637C414}" type="datetimeFigureOut">
               <a:rPr lang="zh-TW" altLang="en-US" smtClean="0"/>
-              <a:t>2023/4/27</a:t>
+              <a:t>2024/8/3</a:t>
             </a:fld>
             <a:endParaRPr lang="zh-TW" altLang="en-US"/>
           </a:p>
@@ -400,10 +398,9 @@
           <a:lstStyle/>
           <a:p>
             <a:r>
-              <a:rPr lang="zh-TW" altLang="en-US" smtClean="0"/>
+              <a:rPr lang="zh-TW" altLang="en-US"/>
               <a:t>按一下以編輯母片標題樣式</a:t>
             </a:r>
-            <a:endParaRPr lang="zh-TW" altLang="en-US"/>
           </a:p>
         </p:txBody>
       </p:sp>
@@ -424,38 +421,37 @@
           <a:p>
             <a:pPr lvl="0"/>
             <a:r>
-              <a:rPr lang="zh-TW" altLang="en-US" smtClean="0"/>
+              <a:rPr lang="zh-TW" altLang="en-US"/>
               <a:t>按一下以編輯母片文字樣式</a:t>
             </a:r>
           </a:p>
           <a:p>
             <a:pPr lvl="1"/>
             <a:r>
-              <a:rPr lang="zh-TW" altLang="en-US" smtClean="0"/>
+              <a:rPr lang="zh-TW" altLang="en-US"/>
               <a:t>第二層</a:t>
             </a:r>
           </a:p>
           <a:p>
             <a:pPr lvl="2"/>
             <a:r>
-              <a:rPr lang="zh-TW" altLang="en-US" smtClean="0"/>
+              <a:rPr lang="zh-TW" altLang="en-US"/>
               <a:t>第三層</a:t>
             </a:r>
           </a:p>
           <a:p>
             <a:pPr lvl="3"/>
             <a:r>
-              <a:rPr lang="zh-TW" altLang="en-US" smtClean="0"/>
+              <a:rPr lang="zh-TW" altLang="en-US"/>
               <a:t>第四層</a:t>
             </a:r>
           </a:p>
           <a:p>
             <a:pPr lvl="4"/>
             <a:r>
-              <a:rPr lang="zh-TW" altLang="en-US" smtClean="0"/>
+              <a:rPr lang="zh-TW" altLang="en-US"/>
               <a:t>第五層</a:t>
             </a:r>
-            <a:endParaRPr lang="zh-TW" altLang="en-US"/>
           </a:p>
         </p:txBody>
       </p:sp>
@@ -476,7 +472,7 @@
           <a:p>
             <a:fld id="{F4DC9DE7-1299-458E-9A51-39F41637C414}" type="datetimeFigureOut">
               <a:rPr lang="zh-TW" altLang="en-US" smtClean="0"/>
-              <a:t>2023/4/27</a:t>
+              <a:t>2024/8/3</a:t>
             </a:fld>
             <a:endParaRPr lang="zh-TW" altLang="en-US"/>
           </a:p>
@@ -570,10 +566,9 @@
           <a:lstStyle/>
           <a:p>
             <a:r>
-              <a:rPr lang="zh-TW" altLang="en-US" smtClean="0"/>
+              <a:rPr lang="zh-TW" altLang="en-US"/>
               <a:t>按一下以編輯母片標題樣式</a:t>
             </a:r>
-            <a:endParaRPr lang="zh-TW" altLang="en-US"/>
           </a:p>
         </p:txBody>
       </p:sp>
@@ -599,38 +594,37 @@
           <a:p>
             <a:pPr lvl="0"/>
             <a:r>
-              <a:rPr lang="zh-TW" altLang="en-US" smtClean="0"/>
+              <a:rPr lang="zh-TW" altLang="en-US"/>
               <a:t>按一下以編輯母片文字樣式</a:t>
             </a:r>
           </a:p>
           <a:p>
             <a:pPr lvl="1"/>
             <a:r>
-              <a:rPr lang="zh-TW" altLang="en-US" smtClean="0"/>
+              <a:rPr lang="zh-TW" altLang="en-US"/>
               <a:t>第二層</a:t>
             </a:r>
           </a:p>
           <a:p>
             <a:pPr lvl="2"/>
             <a:r>
-              <a:rPr lang="zh-TW" altLang="en-US" smtClean="0"/>
+              <a:rPr lang="zh-TW" altLang="en-US"/>
               <a:t>第三層</a:t>
             </a:r>
           </a:p>
           <a:p>
             <a:pPr lvl="3"/>
             <a:r>
-              <a:rPr lang="zh-TW" altLang="en-US" smtClean="0"/>
+              <a:rPr lang="zh-TW" altLang="en-US"/>
               <a:t>第四層</a:t>
             </a:r>
           </a:p>
           <a:p>
             <a:pPr lvl="4"/>
             <a:r>
-              <a:rPr lang="zh-TW" altLang="en-US" smtClean="0"/>
+              <a:rPr lang="zh-TW" altLang="en-US"/>
               <a:t>第五層</a:t>
             </a:r>
-            <a:endParaRPr lang="zh-TW" altLang="en-US"/>
           </a:p>
         </p:txBody>
       </p:sp>
@@ -651,7 +645,7 @@
           <a:p>
             <a:fld id="{F4DC9DE7-1299-458E-9A51-39F41637C414}" type="datetimeFigureOut">
               <a:rPr lang="zh-TW" altLang="en-US" smtClean="0"/>
-              <a:t>2023/4/27</a:t>
+              <a:t>2024/8/3</a:t>
             </a:fld>
             <a:endParaRPr lang="zh-TW" altLang="en-US"/>
           </a:p>
@@ -740,10 +734,9 @@
           <a:lstStyle/>
           <a:p>
             <a:r>
-              <a:rPr lang="zh-TW" altLang="en-US" smtClean="0"/>
+              <a:rPr lang="zh-TW" altLang="en-US"/>
               <a:t>按一下以編輯母片標題樣式</a:t>
             </a:r>
-            <a:endParaRPr lang="zh-TW" altLang="en-US"/>
           </a:p>
         </p:txBody>
       </p:sp>
@@ -764,38 +757,37 @@
           <a:p>
             <a:pPr lvl="0"/>
             <a:r>
-              <a:rPr lang="zh-TW" altLang="en-US" smtClean="0"/>
+              <a:rPr lang="zh-TW" altLang="en-US"/>
               <a:t>按一下以編輯母片文字樣式</a:t>
             </a:r>
           </a:p>
           <a:p>
             <a:pPr lvl="1"/>
             <a:r>
-              <a:rPr lang="zh-TW" altLang="en-US" smtClean="0"/>
+              <a:rPr lang="zh-TW" altLang="en-US"/>
               <a:t>第二層</a:t>
             </a:r>
           </a:p>
           <a:p>
             <a:pPr lvl="2"/>
             <a:r>
-              <a:rPr lang="zh-TW" altLang="en-US" smtClean="0"/>
+              <a:rPr lang="zh-TW" altLang="en-US"/>
               <a:t>第三層</a:t>
             </a:r>
           </a:p>
           <a:p>
             <a:pPr lvl="3"/>
             <a:r>
-              <a:rPr lang="zh-TW" altLang="en-US" smtClean="0"/>
+              <a:rPr lang="zh-TW" altLang="en-US"/>
               <a:t>第四層</a:t>
             </a:r>
           </a:p>
           <a:p>
             <a:pPr lvl="4"/>
             <a:r>
-              <a:rPr lang="zh-TW" altLang="en-US" smtClean="0"/>
+              <a:rPr lang="zh-TW" altLang="en-US"/>
               <a:t>第五層</a:t>
             </a:r>
-            <a:endParaRPr lang="zh-TW" altLang="en-US"/>
           </a:p>
         </p:txBody>
       </p:sp>
@@ -816,7 +808,7 @@
           <a:p>
             <a:fld id="{F4DC9DE7-1299-458E-9A51-39F41637C414}" type="datetimeFigureOut">
               <a:rPr lang="zh-TW" altLang="en-US" smtClean="0"/>
-              <a:t>2023/4/27</a:t>
+              <a:t>2024/8/3</a:t>
             </a:fld>
             <a:endParaRPr lang="zh-TW" altLang="en-US"/>
           </a:p>
@@ -914,10 +906,9 @@
           </a:lstStyle>
           <a:p>
             <a:r>
-              <a:rPr lang="zh-TW" altLang="en-US" smtClean="0"/>
+              <a:rPr lang="zh-TW" altLang="en-US"/>
               <a:t>按一下以編輯母片標題樣式</a:t>
             </a:r>
-            <a:endParaRPr lang="zh-TW" altLang="en-US"/>
           </a:p>
         </p:txBody>
       </p:sp>
@@ -1034,7 +1025,7 @@
           <a:p>
             <a:pPr lvl="0"/>
             <a:r>
-              <a:rPr lang="zh-TW" altLang="en-US" smtClean="0"/>
+              <a:rPr lang="zh-TW" altLang="en-US"/>
               <a:t>按一下以編輯母片文字樣式</a:t>
             </a:r>
           </a:p>
@@ -1057,7 +1048,7 @@
           <a:p>
             <a:fld id="{F4DC9DE7-1299-458E-9A51-39F41637C414}" type="datetimeFigureOut">
               <a:rPr lang="zh-TW" altLang="en-US" smtClean="0"/>
-              <a:t>2023/4/27</a:t>
+              <a:t>2024/8/3</a:t>
             </a:fld>
             <a:endParaRPr lang="zh-TW" altLang="en-US"/>
           </a:p>
@@ -1146,10 +1137,9 @@
           <a:lstStyle/>
           <a:p>
             <a:r>
-              <a:rPr lang="zh-TW" altLang="en-US" smtClean="0"/>
+              <a:rPr lang="zh-TW" altLang="en-US"/>
               <a:t>按一下以編輯母片標題樣式</a:t>
             </a:r>
-            <a:endParaRPr lang="zh-TW" altLang="en-US"/>
           </a:p>
         </p:txBody>
       </p:sp>
@@ -1203,38 +1193,37 @@
           <a:p>
             <a:pPr lvl="0"/>
             <a:r>
-              <a:rPr lang="zh-TW" altLang="en-US" smtClean="0"/>
+              <a:rPr lang="zh-TW" altLang="en-US"/>
               <a:t>按一下以編輯母片文字樣式</a:t>
             </a:r>
           </a:p>
           <a:p>
             <a:pPr lvl="1"/>
             <a:r>
-              <a:rPr lang="zh-TW" altLang="en-US" smtClean="0"/>
+              <a:rPr lang="zh-TW" altLang="en-US"/>
               <a:t>第二層</a:t>
             </a:r>
           </a:p>
           <a:p>
             <a:pPr lvl="2"/>
             <a:r>
-              <a:rPr lang="zh-TW" altLang="en-US" smtClean="0"/>
+              <a:rPr lang="zh-TW" altLang="en-US"/>
               <a:t>第三層</a:t>
             </a:r>
           </a:p>
           <a:p>
             <a:pPr lvl="3"/>
             <a:r>
-              <a:rPr lang="zh-TW" altLang="en-US" smtClean="0"/>
+              <a:rPr lang="zh-TW" altLang="en-US"/>
               <a:t>第四層</a:t>
             </a:r>
           </a:p>
           <a:p>
             <a:pPr lvl="4"/>
             <a:r>
-              <a:rPr lang="zh-TW" altLang="en-US" smtClean="0"/>
+              <a:rPr lang="zh-TW" altLang="en-US"/>
               <a:t>第五層</a:t>
             </a:r>
-            <a:endParaRPr lang="zh-TW" altLang="en-US"/>
           </a:p>
         </p:txBody>
       </p:sp>
@@ -1288,38 +1277,37 @@
           <a:p>
             <a:pPr lvl="0"/>
             <a:r>
-              <a:rPr lang="zh-TW" altLang="en-US" smtClean="0"/>
+              <a:rPr lang="zh-TW" altLang="en-US"/>
               <a:t>按一下以編輯母片文字樣式</a:t>
             </a:r>
           </a:p>
           <a:p>
             <a:pPr lvl="1"/>
             <a:r>
-              <a:rPr lang="zh-TW" altLang="en-US" smtClean="0"/>
+              <a:rPr lang="zh-TW" altLang="en-US"/>
               <a:t>第二層</a:t>
             </a:r>
           </a:p>
           <a:p>
             <a:pPr lvl="2"/>
             <a:r>
-              <a:rPr lang="zh-TW" altLang="en-US" smtClean="0"/>
+              <a:rPr lang="zh-TW" altLang="en-US"/>
               <a:t>第三層</a:t>
             </a:r>
           </a:p>
           <a:p>
             <a:pPr lvl="3"/>
             <a:r>
-              <a:rPr lang="zh-TW" altLang="en-US" smtClean="0"/>
+              <a:rPr lang="zh-TW" altLang="en-US"/>
               <a:t>第四層</a:t>
             </a:r>
           </a:p>
           <a:p>
             <a:pPr lvl="4"/>
             <a:r>
-              <a:rPr lang="zh-TW" altLang="en-US" smtClean="0"/>
+              <a:rPr lang="zh-TW" altLang="en-US"/>
               <a:t>第五層</a:t>
             </a:r>
-            <a:endParaRPr lang="zh-TW" altLang="en-US"/>
           </a:p>
         </p:txBody>
       </p:sp>
@@ -1340,7 +1328,7 @@
           <a:p>
             <a:fld id="{F4DC9DE7-1299-458E-9A51-39F41637C414}" type="datetimeFigureOut">
               <a:rPr lang="zh-TW" altLang="en-US" smtClean="0"/>
-              <a:t>2023/4/27</a:t>
+              <a:t>2024/8/3</a:t>
             </a:fld>
             <a:endParaRPr lang="zh-TW" altLang="en-US"/>
           </a:p>
@@ -1433,10 +1421,9 @@
           </a:lstStyle>
           <a:p>
             <a:r>
-              <a:rPr lang="zh-TW" altLang="en-US" smtClean="0"/>
+              <a:rPr lang="zh-TW" altLang="en-US"/>
               <a:t>按一下以編輯母片標題樣式</a:t>
             </a:r>
-            <a:endParaRPr lang="zh-TW" altLang="en-US"/>
           </a:p>
         </p:txBody>
       </p:sp>
@@ -1499,7 +1486,7 @@
           <a:p>
             <a:pPr lvl="0"/>
             <a:r>
-              <a:rPr lang="zh-TW" altLang="en-US" smtClean="0"/>
+              <a:rPr lang="zh-TW" altLang="en-US"/>
               <a:t>按一下以編輯母片文字樣式</a:t>
             </a:r>
           </a:p>
@@ -1555,38 +1542,37 @@
           <a:p>
             <a:pPr lvl="0"/>
             <a:r>
-              <a:rPr lang="zh-TW" altLang="en-US" smtClean="0"/>
+              <a:rPr lang="zh-TW" altLang="en-US"/>
               <a:t>按一下以編輯母片文字樣式</a:t>
             </a:r>
           </a:p>
           <a:p>
             <a:pPr lvl="1"/>
             <a:r>
-              <a:rPr lang="zh-TW" altLang="en-US" smtClean="0"/>
+              <a:rPr lang="zh-TW" altLang="en-US"/>
               <a:t>第二層</a:t>
             </a:r>
           </a:p>
           <a:p>
             <a:pPr lvl="2"/>
             <a:r>
-              <a:rPr lang="zh-TW" altLang="en-US" smtClean="0"/>
+              <a:rPr lang="zh-TW" altLang="en-US"/>
               <a:t>第三層</a:t>
             </a:r>
           </a:p>
           <a:p>
             <a:pPr lvl="3"/>
             <a:r>
-              <a:rPr lang="zh-TW" altLang="en-US" smtClean="0"/>
+              <a:rPr lang="zh-TW" altLang="en-US"/>
               <a:t>第四層</a:t>
             </a:r>
           </a:p>
           <a:p>
             <a:pPr lvl="4"/>
             <a:r>
-              <a:rPr lang="zh-TW" altLang="en-US" smtClean="0"/>
+              <a:rPr lang="zh-TW" altLang="en-US"/>
               <a:t>第五層</a:t>
             </a:r>
-            <a:endParaRPr lang="zh-TW" altLang="en-US"/>
           </a:p>
         </p:txBody>
       </p:sp>
@@ -1649,7 +1635,7 @@
           <a:p>
             <a:pPr lvl="0"/>
             <a:r>
-              <a:rPr lang="zh-TW" altLang="en-US" smtClean="0"/>
+              <a:rPr lang="zh-TW" altLang="en-US"/>
               <a:t>按一下以編輯母片文字樣式</a:t>
             </a:r>
           </a:p>
@@ -1705,38 +1691,37 @@
           <a:p>
             <a:pPr lvl="0"/>
             <a:r>
-              <a:rPr lang="zh-TW" altLang="en-US" smtClean="0"/>
+              <a:rPr lang="zh-TW" altLang="en-US"/>
               <a:t>按一下以編輯母片文字樣式</a:t>
             </a:r>
           </a:p>
           <a:p>
             <a:pPr lvl="1"/>
             <a:r>
-              <a:rPr lang="zh-TW" altLang="en-US" smtClean="0"/>
+              <a:rPr lang="zh-TW" altLang="en-US"/>
               <a:t>第二層</a:t>
             </a:r>
           </a:p>
           <a:p>
             <a:pPr lvl="2"/>
             <a:r>
-              <a:rPr lang="zh-TW" altLang="en-US" smtClean="0"/>
+              <a:rPr lang="zh-TW" altLang="en-US"/>
               <a:t>第三層</a:t>
             </a:r>
           </a:p>
           <a:p>
             <a:pPr lvl="3"/>
             <a:r>
-              <a:rPr lang="zh-TW" altLang="en-US" smtClean="0"/>
+              <a:rPr lang="zh-TW" altLang="en-US"/>
               <a:t>第四層</a:t>
             </a:r>
           </a:p>
           <a:p>
             <a:pPr lvl="4"/>
             <a:r>
-              <a:rPr lang="zh-TW" altLang="en-US" smtClean="0"/>
+              <a:rPr lang="zh-TW" altLang="en-US"/>
               <a:t>第五層</a:t>
             </a:r>
-            <a:endParaRPr lang="zh-TW" altLang="en-US"/>
           </a:p>
         </p:txBody>
       </p:sp>
@@ -1757,7 +1742,7 @@
           <a:p>
             <a:fld id="{F4DC9DE7-1299-458E-9A51-39F41637C414}" type="datetimeFigureOut">
               <a:rPr lang="zh-TW" altLang="en-US" smtClean="0"/>
-              <a:t>2023/4/27</a:t>
+              <a:t>2024/8/3</a:t>
             </a:fld>
             <a:endParaRPr lang="zh-TW" altLang="en-US"/>
           </a:p>
@@ -1846,10 +1831,9 @@
           <a:lstStyle/>
           <a:p>
             <a:r>
-              <a:rPr lang="zh-TW" altLang="en-US" smtClean="0"/>
+              <a:rPr lang="zh-TW" altLang="en-US"/>
               <a:t>按一下以編輯母片標題樣式</a:t>
             </a:r>
-            <a:endParaRPr lang="zh-TW" altLang="en-US"/>
           </a:p>
         </p:txBody>
       </p:sp>
@@ -1870,7 +1854,7 @@
           <a:p>
             <a:fld id="{F4DC9DE7-1299-458E-9A51-39F41637C414}" type="datetimeFigureOut">
               <a:rPr lang="zh-TW" altLang="en-US" smtClean="0"/>
-              <a:t>2023/4/27</a:t>
+              <a:t>2024/8/3</a:t>
             </a:fld>
             <a:endParaRPr lang="zh-TW" altLang="en-US"/>
           </a:p>
@@ -1960,7 +1944,7 @@
           <a:p>
             <a:fld id="{F4DC9DE7-1299-458E-9A51-39F41637C414}" type="datetimeFigureOut">
               <a:rPr lang="zh-TW" altLang="en-US" smtClean="0"/>
-              <a:t>2023/4/27</a:t>
+              <a:t>2024/8/3</a:t>
             </a:fld>
             <a:endParaRPr lang="zh-TW" altLang="en-US"/>
           </a:p>
@@ -2058,10 +2042,9 @@
           </a:lstStyle>
           <a:p>
             <a:r>
-              <a:rPr lang="zh-TW" altLang="en-US" smtClean="0"/>
+              <a:rPr lang="zh-TW" altLang="en-US"/>
               <a:t>按一下以編輯母片標題樣式</a:t>
             </a:r>
-            <a:endParaRPr lang="zh-TW" altLang="en-US"/>
           </a:p>
         </p:txBody>
       </p:sp>
@@ -2115,38 +2098,37 @@
           <a:p>
             <a:pPr lvl="0"/>
             <a:r>
-              <a:rPr lang="zh-TW" altLang="en-US" smtClean="0"/>
+              <a:rPr lang="zh-TW" altLang="en-US"/>
               <a:t>按一下以編輯母片文字樣式</a:t>
             </a:r>
           </a:p>
           <a:p>
             <a:pPr lvl="1"/>
             <a:r>
-              <a:rPr lang="zh-TW" altLang="en-US" smtClean="0"/>
+              <a:rPr lang="zh-TW" altLang="en-US"/>
               <a:t>第二層</a:t>
             </a:r>
           </a:p>
           <a:p>
             <a:pPr lvl="2"/>
             <a:r>
-              <a:rPr lang="zh-TW" altLang="en-US" smtClean="0"/>
+              <a:rPr lang="zh-TW" altLang="en-US"/>
               <a:t>第三層</a:t>
             </a:r>
           </a:p>
           <a:p>
             <a:pPr lvl="3"/>
             <a:r>
-              <a:rPr lang="zh-TW" altLang="en-US" smtClean="0"/>
+              <a:rPr lang="zh-TW" altLang="en-US"/>
               <a:t>第四層</a:t>
             </a:r>
           </a:p>
           <a:p>
             <a:pPr lvl="4"/>
             <a:r>
-              <a:rPr lang="zh-TW" altLang="en-US" smtClean="0"/>
+              <a:rPr lang="zh-TW" altLang="en-US"/>
               <a:t>第五層</a:t>
             </a:r>
-            <a:endParaRPr lang="zh-TW" altLang="en-US"/>
           </a:p>
         </p:txBody>
       </p:sp>
@@ -2209,7 +2191,7 @@
           <a:p>
             <a:pPr lvl="0"/>
             <a:r>
-              <a:rPr lang="zh-TW" altLang="en-US" smtClean="0"/>
+              <a:rPr lang="zh-TW" altLang="en-US"/>
               <a:t>按一下以編輯母片文字樣式</a:t>
             </a:r>
           </a:p>
@@ -2232,7 +2214,7 @@
           <a:p>
             <a:fld id="{F4DC9DE7-1299-458E-9A51-39F41637C414}" type="datetimeFigureOut">
               <a:rPr lang="zh-TW" altLang="en-US" smtClean="0"/>
-              <a:t>2023/4/27</a:t>
+              <a:t>2024/8/3</a:t>
             </a:fld>
             <a:endParaRPr lang="zh-TW" altLang="en-US"/>
           </a:p>
@@ -2330,10 +2312,9 @@
           </a:lstStyle>
           <a:p>
             <a:r>
-              <a:rPr lang="zh-TW" altLang="en-US" smtClean="0"/>
+              <a:rPr lang="zh-TW" altLang="en-US"/>
               <a:t>按一下以編輯母片標題樣式</a:t>
             </a:r>
-            <a:endParaRPr lang="zh-TW" altLang="en-US"/>
           </a:p>
         </p:txBody>
       </p:sp>
@@ -2395,10 +2376,9 @@
           </a:lstStyle>
           <a:p>
             <a:r>
-              <a:rPr lang="zh-TW" altLang="en-US" smtClean="0"/>
+              <a:rPr lang="zh-TW" altLang="en-US"/>
               <a:t>按一下圖示以新增圖片</a:t>
             </a:r>
-            <a:endParaRPr lang="zh-TW" altLang="en-US"/>
           </a:p>
         </p:txBody>
       </p:sp>
@@ -2461,7 +2441,7 @@
           <a:p>
             <a:pPr lvl="0"/>
             <a:r>
-              <a:rPr lang="zh-TW" altLang="en-US" smtClean="0"/>
+              <a:rPr lang="zh-TW" altLang="en-US"/>
               <a:t>按一下以編輯母片文字樣式</a:t>
             </a:r>
           </a:p>
@@ -2484,7 +2464,7 @@
           <a:p>
             <a:fld id="{F4DC9DE7-1299-458E-9A51-39F41637C414}" type="datetimeFigureOut">
               <a:rPr lang="zh-TW" altLang="en-US" smtClean="0"/>
-              <a:t>2023/4/27</a:t>
+              <a:t>2024/8/3</a:t>
             </a:fld>
             <a:endParaRPr lang="zh-TW" altLang="en-US"/>
           </a:p>
@@ -2593,10 +2573,9 @@
           <a:lstStyle/>
           <a:p>
             <a:r>
-              <a:rPr lang="zh-TW" altLang="en-US" smtClean="0"/>
+              <a:rPr lang="zh-TW" altLang="en-US"/>
               <a:t>按一下以編輯母片標題樣式</a:t>
             </a:r>
-            <a:endParaRPr lang="zh-TW" altLang="en-US"/>
           </a:p>
         </p:txBody>
       </p:sp>
@@ -2627,38 +2606,37 @@
           <a:p>
             <a:pPr lvl="0"/>
             <a:r>
-              <a:rPr lang="zh-TW" altLang="en-US" smtClean="0"/>
+              <a:rPr lang="zh-TW" altLang="en-US"/>
               <a:t>按一下以編輯母片文字樣式</a:t>
             </a:r>
           </a:p>
           <a:p>
             <a:pPr lvl="1"/>
             <a:r>
-              <a:rPr lang="zh-TW" altLang="en-US" smtClean="0"/>
+              <a:rPr lang="zh-TW" altLang="en-US"/>
               <a:t>第二層</a:t>
             </a:r>
           </a:p>
           <a:p>
             <a:pPr lvl="2"/>
             <a:r>
-              <a:rPr lang="zh-TW" altLang="en-US" smtClean="0"/>
+              <a:rPr lang="zh-TW" altLang="en-US"/>
               <a:t>第三層</a:t>
             </a:r>
           </a:p>
           <a:p>
             <a:pPr lvl="3"/>
             <a:r>
-              <a:rPr lang="zh-TW" altLang="en-US" smtClean="0"/>
+              <a:rPr lang="zh-TW" altLang="en-US"/>
               <a:t>第四層</a:t>
             </a:r>
           </a:p>
           <a:p>
             <a:pPr lvl="4"/>
             <a:r>
-              <a:rPr lang="zh-TW" altLang="en-US" smtClean="0"/>
+              <a:rPr lang="zh-TW" altLang="en-US"/>
               <a:t>第五層</a:t>
             </a:r>
-            <a:endParaRPr lang="zh-TW" altLang="en-US"/>
           </a:p>
         </p:txBody>
       </p:sp>
@@ -2697,7 +2675,7 @@
           <a:p>
             <a:fld id="{F4DC9DE7-1299-458E-9A51-39F41637C414}" type="datetimeFigureOut">
               <a:rPr lang="zh-TW" altLang="en-US" smtClean="0"/>
-              <a:t>2023/4/27</a:t>
+              <a:t>2024/8/3</a:t>
             </a:fld>
             <a:endParaRPr lang="zh-TW" altLang="en-US"/>
           </a:p>
@@ -3090,7 +3068,7 @@
           <a:lstStyle/>
           <a:p>
             <a:r>
-              <a:rPr lang="zh-TW" altLang="en-US" sz="5400" b="1" i="1" dirty="0" smtClean="0">
+              <a:rPr lang="zh-TW" altLang="en-US" sz="5400" b="1" i="1" dirty="0">
                 <a:solidFill>
                   <a:srgbClr val="000066"/>
                 </a:solidFill>
@@ -3104,24 +3082,7 @@
                 <a:latin typeface="微軟正黑體" pitchFamily="34" charset="-120"/>
                 <a:ea typeface="微軟正黑體" pitchFamily="34" charset="-120"/>
               </a:rPr>
-              <a:t>我</a:t>
-            </a:r>
-            <a:r>
-              <a:rPr lang="zh-TW" altLang="en-US" sz="5400" b="1" i="1" dirty="0">
-                <a:solidFill>
-                  <a:srgbClr val="000066"/>
-                </a:solidFill>
-                <a:effectLst>
-                  <a:outerShdw blurRad="38100" dist="38100" dir="2700000" algn="tl">
-                    <a:srgbClr val="000000">
-                      <a:alpha val="43137"/>
-                    </a:srgbClr>
-                  </a:outerShdw>
-                </a:effectLst>
-                <a:latin typeface="微軟正黑體" pitchFamily="34" charset="-120"/>
-                <a:ea typeface="微軟正黑體" pitchFamily="34" charset="-120"/>
-              </a:rPr>
-              <a:t>要全心讚美</a:t>
+              <a:t>我要全心讚美</a:t>
             </a:r>
           </a:p>
         </p:txBody>
@@ -3211,49 +3172,29 @@
                 <a:latin typeface="微軟正黑體" pitchFamily="34" charset="-120"/>
                 <a:ea typeface="微軟正黑體" pitchFamily="34" charset="-120"/>
               </a:rPr>
-              <a:t>進</a:t>
-            </a:r>
-            <a:r>
-              <a:rPr lang="zh-TW" altLang="en-US" sz="4800" b="1" dirty="0" smtClean="0">
+              <a:t>進入</a:t>
+            </a:r>
+            <a:r>
+              <a:rPr lang="zh-CN" altLang="en-US" sz="4800" b="1" dirty="0">
                 <a:solidFill>
                   <a:srgbClr val="000066"/>
                 </a:solidFill>
                 <a:latin typeface="微軟正黑體" pitchFamily="34" charset="-120"/>
                 <a:ea typeface="微軟正黑體" pitchFamily="34" charset="-120"/>
               </a:rPr>
-              <a:t>入</a:t>
-            </a:r>
-            <a:r>
-              <a:rPr lang="zh-CN" altLang="en-US" sz="4800" b="1" dirty="0">
+              <a:t>祢</a:t>
+            </a:r>
+            <a:r>
+              <a:rPr lang="zh-TW" altLang="en-US" sz="4800" b="1" dirty="0">
                 <a:solidFill>
                   <a:srgbClr val="000066"/>
                 </a:solidFill>
                 <a:latin typeface="微軟正黑體" pitchFamily="34" charset="-120"/>
                 <a:ea typeface="微軟正黑體" pitchFamily="34" charset="-120"/>
               </a:rPr>
-              <a:t>祢</a:t>
-            </a:r>
-            <a:r>
-              <a:rPr lang="zh-TW" altLang="en-US" sz="4800" b="1" dirty="0" smtClean="0">
-                <a:solidFill>
-                  <a:srgbClr val="000066"/>
-                </a:solidFill>
-                <a:latin typeface="微軟正黑體" pitchFamily="34" charset="-120"/>
-                <a:ea typeface="微軟正黑體" pitchFamily="34" charset="-120"/>
-              </a:rPr>
-              <a:t>的</a:t>
-            </a:r>
-            <a:r>
-              <a:rPr lang="zh-TW" altLang="en-US" sz="4800" b="1" dirty="0">
-                <a:solidFill>
-                  <a:srgbClr val="000066"/>
-                </a:solidFill>
-                <a:latin typeface="微軟正黑體" pitchFamily="34" charset="-120"/>
-                <a:ea typeface="微軟正黑體" pitchFamily="34" charset="-120"/>
-              </a:rPr>
-              <a:t>院</a:t>
-            </a:r>
-            <a:endParaRPr lang="en-US" altLang="zh-TW" sz="4800" b="1" dirty="0" smtClean="0">
+              <a:t>的院</a:t>
+            </a:r>
+            <a:endParaRPr lang="en-US" altLang="zh-TW" sz="4800" b="1" dirty="0">
               <a:solidFill>
                 <a:srgbClr val="000066"/>
               </a:solidFill>
@@ -3272,7 +3213,7 @@
         <p:spPr>
           <a:xfrm>
             <a:off x="0" y="3867894"/>
-            <a:ext cx="9144000" cy="584775"/>
+            <a:ext cx="9144000" cy="523220"/>
           </a:xfrm>
           <a:prstGeom prst="rect">
             <a:avLst/>
@@ -3287,7 +3228,7 @@
           <a:p>
             <a:pPr algn="ctr"/>
             <a:r>
-              <a:rPr lang="en-US" sz="3200" b="1" dirty="0" smtClean="0">
+              <a:rPr lang="en-US" sz="2800" b="1" dirty="0">
                 <a:solidFill>
                   <a:srgbClr val="000066"/>
                 </a:solidFill>
@@ -3297,17 +3238,17 @@
               <a:t>( </a:t>
             </a:r>
             <a:r>
-              <a:rPr lang="zh-CN" altLang="en-US" sz="3200" b="1" dirty="0" smtClean="0">
+              <a:rPr lang="zh-CN" altLang="en-US" sz="2800" b="1" dirty="0">
                 <a:solidFill>
                   <a:srgbClr val="000066"/>
                 </a:solidFill>
                 <a:latin typeface="Microsoft JhengHei" panose="020B0604030504040204" pitchFamily="34" charset="-120"/>
                 <a:ea typeface="Microsoft JhengHei" panose="020B0604030504040204" pitchFamily="34" charset="-120"/>
               </a:rPr>
-              <a:t>正</a:t>
-            </a:r>
-            <a:r>
-              <a:rPr lang="en-US" sz="3200" b="1" dirty="0" smtClean="0">
+              <a:t>正歌</a:t>
+            </a:r>
+            <a:r>
+              <a:rPr lang="en-US" sz="2800" b="1" dirty="0">
                 <a:solidFill>
                   <a:srgbClr val="000066"/>
                 </a:solidFill>
@@ -3316,7 +3257,7 @@
               </a:rPr>
               <a:t> )</a:t>
             </a:r>
-            <a:endParaRPr lang="vi-VN" sz="3200" b="1" dirty="0">
+            <a:endParaRPr lang="vi-VN" sz="2800" b="1" dirty="0">
               <a:solidFill>
                 <a:srgbClr val="000066"/>
               </a:solidFill>
@@ -3444,7 +3385,7 @@
         <p:spPr>
           <a:xfrm>
             <a:off x="0" y="3867894"/>
-            <a:ext cx="9144000" cy="584775"/>
+            <a:ext cx="9144000" cy="523220"/>
           </a:xfrm>
           <a:prstGeom prst="rect">
             <a:avLst/>
@@ -3459,7 +3400,7 @@
           <a:p>
             <a:pPr algn="ctr"/>
             <a:r>
-              <a:rPr lang="en-US" sz="3200" b="1" dirty="0" smtClean="0">
+              <a:rPr lang="en-US" sz="2800" b="1" dirty="0">
                 <a:solidFill>
                   <a:srgbClr val="000066"/>
                 </a:solidFill>
@@ -3469,17 +3410,17 @@
               <a:t>( </a:t>
             </a:r>
             <a:r>
-              <a:rPr lang="zh-CN" altLang="en-US" sz="3200" b="1" dirty="0" smtClean="0">
+              <a:rPr lang="zh-CN" altLang="en-US" sz="2800" b="1" dirty="0">
                 <a:solidFill>
                   <a:srgbClr val="000066"/>
                 </a:solidFill>
                 <a:latin typeface="Microsoft JhengHei" panose="020B0604030504040204" pitchFamily="34" charset="-120"/>
                 <a:ea typeface="Microsoft JhengHei" panose="020B0604030504040204" pitchFamily="34" charset="-120"/>
               </a:rPr>
-              <a:t>正</a:t>
-            </a:r>
-            <a:r>
-              <a:rPr lang="en-US" sz="3200" b="1" dirty="0" smtClean="0">
+              <a:t>正歌</a:t>
+            </a:r>
+            <a:r>
+              <a:rPr lang="en-US" sz="2800" b="1" dirty="0">
                 <a:solidFill>
                   <a:srgbClr val="000066"/>
                 </a:solidFill>
@@ -3488,7 +3429,7 @@
               </a:rPr>
               <a:t> )</a:t>
             </a:r>
-            <a:endParaRPr lang="vi-VN" sz="3200" b="1" dirty="0">
+            <a:endParaRPr lang="vi-VN" sz="2800" b="1" dirty="0">
               <a:solidFill>
                 <a:srgbClr val="000066"/>
               </a:solidFill>
@@ -3553,7 +3494,7 @@
               <a:buNone/>
             </a:pPr>
             <a:r>
-              <a:rPr lang="zh-TW" altLang="en-US" sz="4800" b="1" dirty="0" smtClean="0">
+              <a:rPr lang="zh-TW" altLang="en-US" sz="4800" b="1" dirty="0">
                 <a:solidFill>
                   <a:srgbClr val="000066"/>
                 </a:solidFill>
@@ -3573,24 +3514,14 @@
               <a:t>祢</a:t>
             </a:r>
             <a:r>
-              <a:rPr lang="zh-TW" altLang="en-US" sz="4800" b="1" dirty="0" smtClean="0">
+              <a:rPr lang="zh-TW" altLang="en-US" sz="4800" b="1" dirty="0">
                 <a:solidFill>
                   <a:srgbClr val="000066"/>
                 </a:solidFill>
                 <a:latin typeface="微軟正黑體" pitchFamily="34" charset="-120"/>
                 <a:ea typeface="微軟正黑體" pitchFamily="34" charset="-120"/>
               </a:rPr>
-              <a:t>裡</a:t>
-            </a:r>
-            <a:r>
-              <a:rPr lang="zh-TW" altLang="en-US" sz="4800" b="1" dirty="0">
-                <a:solidFill>
-                  <a:srgbClr val="000066"/>
-                </a:solidFill>
-                <a:latin typeface="微軟正黑體" pitchFamily="34" charset="-120"/>
-                <a:ea typeface="微軟正黑體" pitchFamily="34" charset="-120"/>
-              </a:rPr>
-              <a:t>面  一無罣慮</a:t>
+              <a:t>裡面  一無罣慮</a:t>
             </a:r>
             <a:r>
               <a:rPr lang="en-US" altLang="zh-TW" sz="4800" b="1" dirty="0">
@@ -3629,7 +3560,7 @@
         <p:spPr>
           <a:xfrm>
             <a:off x="0" y="3867894"/>
-            <a:ext cx="9144000" cy="584775"/>
+            <a:ext cx="9144000" cy="523220"/>
           </a:xfrm>
           <a:prstGeom prst="rect">
             <a:avLst/>
@@ -3644,7 +3575,7 @@
           <a:p>
             <a:pPr algn="ctr"/>
             <a:r>
-              <a:rPr lang="en-US" sz="3200" b="1" dirty="0" smtClean="0">
+              <a:rPr lang="en-US" sz="2800" b="1" dirty="0">
                 <a:solidFill>
                   <a:srgbClr val="000066"/>
                 </a:solidFill>
@@ -3654,17 +3585,17 @@
               <a:t>( </a:t>
             </a:r>
             <a:r>
-              <a:rPr lang="zh-CN" altLang="en-US" sz="3200" b="1" dirty="0" smtClean="0">
+              <a:rPr lang="zh-CN" altLang="en-US" sz="2800" b="1" dirty="0">
                 <a:solidFill>
                   <a:srgbClr val="000066"/>
                 </a:solidFill>
                 <a:latin typeface="Microsoft JhengHei" panose="020B0604030504040204" pitchFamily="34" charset="-120"/>
                 <a:ea typeface="Microsoft JhengHei" panose="020B0604030504040204" pitchFamily="34" charset="-120"/>
               </a:rPr>
-              <a:t>正</a:t>
-            </a:r>
-            <a:r>
-              <a:rPr lang="en-US" sz="3200" b="1" dirty="0" smtClean="0">
+              <a:t>正歌</a:t>
+            </a:r>
+            <a:r>
+              <a:rPr lang="en-US" sz="2800" b="1" dirty="0">
                 <a:solidFill>
                   <a:srgbClr val="000066"/>
                 </a:solidFill>
@@ -3673,7 +3604,7 @@
               </a:rPr>
               <a:t> )</a:t>
             </a:r>
-            <a:endParaRPr lang="vi-VN" sz="3200" b="1" dirty="0">
+            <a:endParaRPr lang="vi-VN" sz="2800" b="1" dirty="0">
               <a:solidFill>
                 <a:srgbClr val="000066"/>
               </a:solidFill>
@@ -3767,17 +3698,7 @@
                 <a:latin typeface="微軟正黑體" pitchFamily="34" charset="-120"/>
                 <a:ea typeface="微軟正黑體" pitchFamily="34" charset="-120"/>
               </a:rPr>
-              <a:t>盼望在</a:t>
-            </a:r>
-            <a:r>
-              <a:rPr lang="zh-TW" altLang="en-US" sz="4800" b="1" dirty="0" smtClean="0">
-                <a:solidFill>
-                  <a:srgbClr val="000066"/>
-                </a:solidFill>
-                <a:latin typeface="微軟正黑體" pitchFamily="34" charset="-120"/>
-                <a:ea typeface="微軟正黑體" pitchFamily="34" charset="-120"/>
-              </a:rPr>
-              <a:t>於</a:t>
+              <a:t>盼望在於</a:t>
             </a:r>
             <a:r>
               <a:rPr lang="zh-CN" altLang="en-US" sz="4800" b="1" dirty="0">
@@ -3808,7 +3729,7 @@
         <p:spPr>
           <a:xfrm>
             <a:off x="0" y="3867894"/>
-            <a:ext cx="9144000" cy="584775"/>
+            <a:ext cx="9144000" cy="523220"/>
           </a:xfrm>
           <a:prstGeom prst="rect">
             <a:avLst/>
@@ -3823,7 +3744,7 @@
           <a:p>
             <a:pPr algn="ctr"/>
             <a:r>
-              <a:rPr lang="en-US" sz="3200" b="1" dirty="0" smtClean="0">
+              <a:rPr lang="en-US" sz="2800" b="1" dirty="0">
                 <a:solidFill>
                   <a:srgbClr val="000066"/>
                 </a:solidFill>
@@ -3833,17 +3754,17 @@
               <a:t>( </a:t>
             </a:r>
             <a:r>
-              <a:rPr lang="zh-CN" altLang="en-US" sz="3200" b="1" dirty="0" smtClean="0">
+              <a:rPr lang="zh-CN" altLang="en-US" sz="2800" b="1" dirty="0">
                 <a:solidFill>
                   <a:srgbClr val="000066"/>
                 </a:solidFill>
                 <a:latin typeface="Microsoft JhengHei" panose="020B0604030504040204" pitchFamily="34" charset="-120"/>
                 <a:ea typeface="Microsoft JhengHei" panose="020B0604030504040204" pitchFamily="34" charset="-120"/>
               </a:rPr>
-              <a:t>正</a:t>
-            </a:r>
-            <a:r>
-              <a:rPr lang="en-US" sz="3200" b="1" dirty="0" smtClean="0">
+              <a:t>正歌</a:t>
+            </a:r>
+            <a:r>
+              <a:rPr lang="en-US" sz="2800" b="1" dirty="0">
                 <a:solidFill>
                   <a:srgbClr val="000066"/>
                 </a:solidFill>
@@ -3852,7 +3773,7 @@
               </a:rPr>
               <a:t> )</a:t>
             </a:r>
-            <a:endParaRPr lang="vi-VN" sz="3200" b="1" dirty="0">
+            <a:endParaRPr lang="vi-VN" sz="2800" b="1" dirty="0">
               <a:solidFill>
                 <a:srgbClr val="000066"/>
               </a:solidFill>
@@ -3924,17 +3845,17 @@
                 <a:latin typeface="微軟正黑體" pitchFamily="34" charset="-120"/>
                 <a:ea typeface="微軟正黑體" pitchFamily="34" charset="-120"/>
               </a:rPr>
-              <a:t>我要全心讚美  </a:t>
-            </a:r>
-            <a:r>
-              <a:rPr lang="zh-TW" altLang="en-US" sz="4800" b="1" dirty="0" smtClean="0">
+              <a:t>我要全心讚美  跳舞頌揚</a:t>
+            </a:r>
+            <a:r>
+              <a:rPr lang="zh-CN" altLang="en-US" sz="4800" b="1" dirty="0">
                 <a:solidFill>
                   <a:srgbClr val="000066"/>
                 </a:solidFill>
                 <a:latin typeface="微軟正黑體" pitchFamily="34" charset="-120"/>
                 <a:ea typeface="微軟正黑體" pitchFamily="34" charset="-120"/>
               </a:rPr>
-              <a:t>跳</a:t>
+              <a:t>祢</a:t>
             </a:r>
             <a:r>
               <a:rPr lang="zh-TW" altLang="en-US" sz="4800" b="1" dirty="0">
@@ -3944,119 +3865,7 @@
                 <a:latin typeface="微軟正黑體" pitchFamily="34" charset="-120"/>
                 <a:ea typeface="微軟正黑體" pitchFamily="34" charset="-120"/>
               </a:rPr>
-              <a:t>舞頌</a:t>
-            </a:r>
-            <a:r>
-              <a:rPr lang="zh-TW" altLang="en-US" sz="4800" b="1" dirty="0" smtClean="0">
-                <a:solidFill>
-                  <a:srgbClr val="000066"/>
-                </a:solidFill>
-                <a:latin typeface="微軟正黑體" pitchFamily="34" charset="-120"/>
-                <a:ea typeface="微軟正黑體" pitchFamily="34" charset="-120"/>
-              </a:rPr>
-              <a:t>揚</a:t>
-            </a:r>
-            <a:r>
-              <a:rPr lang="zh-CN" altLang="en-US" sz="4800" b="1" dirty="0">
-                <a:solidFill>
-                  <a:srgbClr val="000066"/>
-                </a:solidFill>
-                <a:latin typeface="微軟正黑體" pitchFamily="34" charset="-120"/>
-                <a:ea typeface="微軟正黑體" pitchFamily="34" charset="-120"/>
-              </a:rPr>
-              <a:t>祢</a:t>
-            </a:r>
-            <a:r>
-              <a:rPr lang="zh-TW" altLang="en-US" sz="4800" b="1" dirty="0" smtClean="0">
-                <a:solidFill>
-                  <a:srgbClr val="000066"/>
-                </a:solidFill>
-                <a:latin typeface="微軟正黑體" pitchFamily="34" charset="-120"/>
-                <a:ea typeface="微軟正黑體" pitchFamily="34" charset="-120"/>
-              </a:rPr>
               <a:t>名</a:t>
-            </a:r>
-            <a:endParaRPr lang="en-US" altLang="zh-TW" sz="4800" b="1" dirty="0" smtClean="0">
-              <a:solidFill>
-                <a:srgbClr val="000066"/>
-              </a:solidFill>
-              <a:latin typeface="微軟正黑體" pitchFamily="34" charset="-120"/>
-              <a:ea typeface="微軟正黑體" pitchFamily="34" charset="-120"/>
-            </a:endParaRPr>
-          </a:p>
-          <a:p>
-            <a:pPr algn="ctr">
-              <a:buNone/>
-            </a:pPr>
-            <a:r>
-              <a:rPr lang="zh-TW" altLang="en-US" sz="4800" b="1" dirty="0" smtClean="0">
-                <a:solidFill>
-                  <a:srgbClr val="000066"/>
-                </a:solidFill>
-                <a:latin typeface="微軟正黑體" pitchFamily="34" charset="-120"/>
-                <a:ea typeface="微軟正黑體" pitchFamily="34" charset="-120"/>
-              </a:rPr>
-              <a:t>在</a:t>
-            </a:r>
-            <a:r>
-              <a:rPr lang="zh-CN" altLang="en-US" sz="4800" b="1" dirty="0">
-                <a:solidFill>
-                  <a:srgbClr val="000066"/>
-                </a:solidFill>
-                <a:latin typeface="微軟正黑體" pitchFamily="34" charset="-120"/>
-                <a:ea typeface="微軟正黑體" pitchFamily="34" charset="-120"/>
-              </a:rPr>
-              <a:t>祢</a:t>
-            </a:r>
-            <a:r>
-              <a:rPr lang="zh-TW" altLang="en-US" sz="4800" b="1" dirty="0" smtClean="0">
-                <a:solidFill>
-                  <a:srgbClr val="000066"/>
-                </a:solidFill>
-                <a:latin typeface="微軟正黑體" pitchFamily="34" charset="-120"/>
-                <a:ea typeface="微軟正黑體" pitchFamily="34" charset="-120"/>
-              </a:rPr>
-              <a:t>殿</a:t>
-            </a:r>
-            <a:r>
-              <a:rPr lang="zh-TW" altLang="en-US" sz="4800" b="1" dirty="0">
-                <a:solidFill>
-                  <a:srgbClr val="000066"/>
-                </a:solidFill>
-                <a:latin typeface="微軟正黑體" pitchFamily="34" charset="-120"/>
-                <a:ea typeface="微軟正黑體" pitchFamily="34" charset="-120"/>
-              </a:rPr>
-              <a:t>中一日勝過</a:t>
-            </a:r>
-            <a:r>
-              <a:rPr lang="en-US" altLang="zh-TW" sz="4800" b="1" dirty="0">
-                <a:solidFill>
-                  <a:srgbClr val="000066"/>
-                </a:solidFill>
-                <a:latin typeface="微軟正黑體" pitchFamily="34" charset="-120"/>
-                <a:ea typeface="微軟正黑體" pitchFamily="34" charset="-120"/>
-              </a:rPr>
-              <a:t>  </a:t>
-            </a:r>
-            <a:r>
-              <a:rPr lang="zh-TW" altLang="en-US" sz="4800" b="1" dirty="0">
-                <a:solidFill>
-                  <a:srgbClr val="000066"/>
-                </a:solidFill>
-                <a:latin typeface="微軟正黑體" pitchFamily="34" charset="-120"/>
-                <a:ea typeface="微軟正黑體" pitchFamily="34" charset="-120"/>
-              </a:rPr>
-              <a:t>在世上千</a:t>
-            </a:r>
-            <a:r>
-              <a:rPr lang="zh-TW" altLang="en-US" sz="4800" b="1" dirty="0" smtClean="0">
-                <a:solidFill>
-                  <a:srgbClr val="000066"/>
-                </a:solidFill>
-                <a:latin typeface="微軟正黑體" pitchFamily="34" charset="-120"/>
-                <a:ea typeface="微軟正黑體" pitchFamily="34" charset="-120"/>
-              </a:rPr>
-              <a:t>日</a:t>
             </a:r>
             <a:endParaRPr lang="en-US" altLang="zh-TW" sz="4800" b="1" dirty="0">
               <a:solidFill>
@@ -4066,6 +3875,68 @@
               <a:ea typeface="微軟正黑體" pitchFamily="34" charset="-120"/>
             </a:endParaRPr>
           </a:p>
+          <a:p>
+            <a:pPr algn="ctr">
+              <a:buNone/>
+            </a:pPr>
+            <a:r>
+              <a:rPr lang="zh-TW" altLang="en-US" sz="4800" b="1" dirty="0">
+                <a:solidFill>
+                  <a:srgbClr val="000066"/>
+                </a:solidFill>
+                <a:latin typeface="微軟正黑體" pitchFamily="34" charset="-120"/>
+                <a:ea typeface="微軟正黑體" pitchFamily="34" charset="-120"/>
+              </a:rPr>
+              <a:t>在</a:t>
+            </a:r>
+            <a:r>
+              <a:rPr lang="zh-CN" altLang="en-US" sz="4800" b="1" dirty="0">
+                <a:solidFill>
+                  <a:srgbClr val="000066"/>
+                </a:solidFill>
+                <a:latin typeface="微軟正黑體" pitchFamily="34" charset="-120"/>
+                <a:ea typeface="微軟正黑體" pitchFamily="34" charset="-120"/>
+              </a:rPr>
+              <a:t>祢</a:t>
+            </a:r>
+            <a:r>
+              <a:rPr lang="zh-TW" altLang="en-US" sz="4800" b="1" dirty="0">
+                <a:solidFill>
+                  <a:srgbClr val="000066"/>
+                </a:solidFill>
+                <a:latin typeface="微軟正黑體" pitchFamily="34" charset="-120"/>
+                <a:ea typeface="微軟正黑體" pitchFamily="34" charset="-120"/>
+              </a:rPr>
+              <a:t>殿中一日勝過</a:t>
+            </a:r>
+            <a:r>
+              <a:rPr lang="en-US" altLang="zh-TW" sz="4800" b="1" dirty="0">
+                <a:solidFill>
+                  <a:srgbClr val="000066"/>
+                </a:solidFill>
+                <a:latin typeface="微軟正黑體" pitchFamily="34" charset="-120"/>
+                <a:ea typeface="微軟正黑體" pitchFamily="34" charset="-120"/>
+              </a:rPr>
+              <a:t>  </a:t>
+            </a:r>
+            <a:r>
+              <a:rPr lang="zh-TW" altLang="en-US" sz="4800" b="1" dirty="0">
+                <a:solidFill>
+                  <a:srgbClr val="000066"/>
+                </a:solidFill>
+                <a:latin typeface="微軟正黑體" pitchFamily="34" charset="-120"/>
+                <a:ea typeface="微軟正黑體" pitchFamily="34" charset="-120"/>
+              </a:rPr>
+              <a:t>在世上千日</a:t>
+            </a:r>
+            <a:endParaRPr lang="en-US" altLang="zh-TW" sz="4800" b="1" dirty="0">
+              <a:solidFill>
+                <a:srgbClr val="000066"/>
+              </a:solidFill>
+              <a:latin typeface="微軟正黑體" pitchFamily="34" charset="-120"/>
+              <a:ea typeface="微軟正黑體" pitchFamily="34" charset="-120"/>
+            </a:endParaRPr>
+          </a:p>
         </p:txBody>
       </p:sp>
       <p:sp>
@@ -4077,7 +3948,7 @@
         <p:spPr>
           <a:xfrm>
             <a:off x="0" y="3867894"/>
-            <a:ext cx="9144000" cy="584775"/>
+            <a:ext cx="9144000" cy="523220"/>
           </a:xfrm>
           <a:prstGeom prst="rect">
             <a:avLst/>
@@ -4092,7 +3963,7 @@
           <a:p>
             <a:pPr algn="ctr"/>
             <a:r>
-              <a:rPr lang="en-US" sz="3200" b="1" dirty="0" smtClean="0">
+              <a:rPr lang="en-US" sz="2800" b="1" dirty="0">
                 <a:solidFill>
                   <a:srgbClr val="000066"/>
                 </a:solidFill>
@@ -4102,17 +3973,17 @@
               <a:t>( </a:t>
             </a:r>
             <a:r>
-              <a:rPr lang="zh-CN" altLang="en-US" sz="3200" b="1" dirty="0" smtClean="0">
+              <a:rPr lang="zh-CN" altLang="en-US" sz="2800" b="1" dirty="0">
                 <a:solidFill>
                   <a:srgbClr val="000066"/>
                 </a:solidFill>
                 <a:latin typeface="Microsoft JhengHei" panose="020B0604030504040204" pitchFamily="34" charset="-120"/>
                 <a:ea typeface="Microsoft JhengHei" panose="020B0604030504040204" pitchFamily="34" charset="-120"/>
               </a:rPr>
-              <a:t>副</a:t>
-            </a:r>
-            <a:r>
-              <a:rPr lang="en-US" sz="3200" b="1" dirty="0" smtClean="0">
+              <a:t>副歌</a:t>
+            </a:r>
+            <a:r>
+              <a:rPr lang="en-US" sz="2800" b="1" dirty="0">
                 <a:solidFill>
                   <a:srgbClr val="000066"/>
                 </a:solidFill>
@@ -4121,7 +3992,7 @@
               </a:rPr>
               <a:t> )</a:t>
             </a:r>
-            <a:endParaRPr lang="vi-VN" sz="3200" b="1" dirty="0">
+            <a:endParaRPr lang="vi-VN" sz="2800" b="1" dirty="0">
               <a:solidFill>
                 <a:srgbClr val="000066"/>
               </a:solidFill>
@@ -4239,7 +4110,7 @@
         <p:spPr>
           <a:xfrm>
             <a:off x="0" y="3867894"/>
-            <a:ext cx="9144000" cy="584775"/>
+            <a:ext cx="9144000" cy="523220"/>
           </a:xfrm>
           <a:prstGeom prst="rect">
             <a:avLst/>
@@ -4254,7 +4125,7 @@
           <a:p>
             <a:pPr algn="ctr"/>
             <a:r>
-              <a:rPr lang="en-US" sz="3200" b="1" dirty="0" smtClean="0">
+              <a:rPr lang="en-US" sz="2800" b="1" dirty="0">
                 <a:solidFill>
                   <a:srgbClr val="000066"/>
                 </a:solidFill>
@@ -4264,17 +4135,17 @@
               <a:t>( </a:t>
             </a:r>
             <a:r>
-              <a:rPr lang="zh-CN" altLang="en-US" sz="3200" b="1" dirty="0" smtClean="0">
+              <a:rPr lang="zh-CN" altLang="en-US" sz="2800" b="1" dirty="0">
                 <a:solidFill>
                   <a:srgbClr val="000066"/>
                 </a:solidFill>
                 <a:latin typeface="Microsoft JhengHei" panose="020B0604030504040204" pitchFamily="34" charset="-120"/>
                 <a:ea typeface="Microsoft JhengHei" panose="020B0604030504040204" pitchFamily="34" charset="-120"/>
               </a:rPr>
-              <a:t>副</a:t>
-            </a:r>
-            <a:r>
-              <a:rPr lang="en-US" sz="3200" b="1" dirty="0" smtClean="0">
+              <a:t>副歌</a:t>
+            </a:r>
+            <a:r>
+              <a:rPr lang="en-US" sz="2800" b="1" dirty="0">
                 <a:solidFill>
                   <a:srgbClr val="000066"/>
                 </a:solidFill>
@@ -4283,7 +4154,7 @@
               </a:rPr>
               <a:t> )</a:t>
             </a:r>
-            <a:endParaRPr lang="vi-VN" sz="3200" b="1" dirty="0">
+            <a:endParaRPr lang="vi-VN" sz="2800" b="1" dirty="0">
               <a:solidFill>
                 <a:srgbClr val="000066"/>
               </a:solidFill>
@@ -4369,7 +4240,7 @@
         <p:spPr>
           <a:xfrm>
             <a:off x="0" y="3867894"/>
-            <a:ext cx="9144000" cy="584775"/>
+            <a:ext cx="9144000" cy="523220"/>
           </a:xfrm>
           <a:prstGeom prst="rect">
             <a:avLst/>
@@ -4384,7 +4255,7 @@
           <a:p>
             <a:pPr algn="ctr"/>
             <a:r>
-              <a:rPr lang="en-US" sz="3200" b="1" dirty="0" smtClean="0">
+              <a:rPr lang="en-US" sz="2800" b="1" dirty="0">
                 <a:solidFill>
                   <a:srgbClr val="000066"/>
                 </a:solidFill>
@@ -4394,17 +4265,17 @@
               <a:t>( </a:t>
             </a:r>
             <a:r>
-              <a:rPr lang="zh-CN" altLang="en-US" sz="3200" b="1" dirty="0" smtClean="0">
+              <a:rPr lang="zh-CN" altLang="en-US" sz="2800" b="1" dirty="0">
                 <a:solidFill>
                   <a:srgbClr val="000066"/>
                 </a:solidFill>
                 <a:latin typeface="Microsoft JhengHei" panose="020B0604030504040204" pitchFamily="34" charset="-120"/>
                 <a:ea typeface="Microsoft JhengHei" panose="020B0604030504040204" pitchFamily="34" charset="-120"/>
               </a:rPr>
-              <a:t>副</a:t>
-            </a:r>
-            <a:r>
-              <a:rPr lang="en-US" sz="3200" b="1" dirty="0" smtClean="0">
+              <a:t>副歌</a:t>
+            </a:r>
+            <a:r>
+              <a:rPr lang="en-US" sz="2800" b="1" dirty="0">
                 <a:solidFill>
                   <a:srgbClr val="000066"/>
                 </a:solidFill>
@@ -4413,7 +4284,7 @@
               </a:rPr>
               <a:t> )</a:t>
             </a:r>
-            <a:endParaRPr lang="vi-VN" sz="3200" b="1" dirty="0">
+            <a:endParaRPr lang="vi-VN" sz="2800" b="1" dirty="0">
               <a:solidFill>
                 <a:srgbClr val="000066"/>
               </a:solidFill>

--- a/我要全心讚美.pptx
+++ b/我要全心讚美.pptx
@@ -113,7 +113,7 @@
   </p:defaultTextStyle>
   <p:extLst>
     <p:ext uri="{EFAFB233-063F-42B5-8137-9DF3F51BA10A}">
-      <p15:sldGuideLst xmlns:p15="http://schemas.microsoft.com/office/powerpoint/2012/main">
+      <p15:sldGuideLst xmlns:p15="http://schemas.microsoft.com/office/powerpoint/2012/main" xmlns="">
         <p15:guide id="1" orient="horz" pos="1620">
           <p15:clr>
             <a:srgbClr val="A4A3A4"/>
@@ -311,7 +311,8 @@
           <a:p>
             <a:fld id="{F4DC9DE7-1299-458E-9A51-39F41637C414}" type="datetimeFigureOut">
               <a:rPr lang="zh-TW" altLang="en-US" smtClean="0"/>
-              <a:t>2023/4/27</a:t>
+              <a:pPr/>
+              <a:t>2024/9/8</a:t>
             </a:fld>
             <a:endParaRPr lang="zh-TW" altLang="en-US"/>
           </a:p>
@@ -353,6 +354,7 @@
           <a:p>
             <a:fld id="{AD4A426F-D02E-413A-A88D-BB0531786194}" type="slidenum">
               <a:rPr lang="zh-TW" altLang="en-US" smtClean="0"/>
+              <a:pPr/>
               <a:t>‹#›</a:t>
             </a:fld>
             <a:endParaRPr lang="zh-TW" altLang="en-US"/>
@@ -476,7 +478,8 @@
           <a:p>
             <a:fld id="{F4DC9DE7-1299-458E-9A51-39F41637C414}" type="datetimeFigureOut">
               <a:rPr lang="zh-TW" altLang="en-US" smtClean="0"/>
-              <a:t>2023/4/27</a:t>
+              <a:pPr/>
+              <a:t>2024/9/8</a:t>
             </a:fld>
             <a:endParaRPr lang="zh-TW" altLang="en-US"/>
           </a:p>
@@ -518,6 +521,7 @@
           <a:p>
             <a:fld id="{AD4A426F-D02E-413A-A88D-BB0531786194}" type="slidenum">
               <a:rPr lang="zh-TW" altLang="en-US" smtClean="0"/>
+              <a:pPr/>
               <a:t>‹#›</a:t>
             </a:fld>
             <a:endParaRPr lang="zh-TW" altLang="en-US"/>
@@ -651,7 +655,8 @@
           <a:p>
             <a:fld id="{F4DC9DE7-1299-458E-9A51-39F41637C414}" type="datetimeFigureOut">
               <a:rPr lang="zh-TW" altLang="en-US" smtClean="0"/>
-              <a:t>2023/4/27</a:t>
+              <a:pPr/>
+              <a:t>2024/9/8</a:t>
             </a:fld>
             <a:endParaRPr lang="zh-TW" altLang="en-US"/>
           </a:p>
@@ -693,6 +698,7 @@
           <a:p>
             <a:fld id="{AD4A426F-D02E-413A-A88D-BB0531786194}" type="slidenum">
               <a:rPr lang="zh-TW" altLang="en-US" smtClean="0"/>
+              <a:pPr/>
               <a:t>‹#›</a:t>
             </a:fld>
             <a:endParaRPr lang="zh-TW" altLang="en-US"/>
@@ -816,7 +822,8 @@
           <a:p>
             <a:fld id="{F4DC9DE7-1299-458E-9A51-39F41637C414}" type="datetimeFigureOut">
               <a:rPr lang="zh-TW" altLang="en-US" smtClean="0"/>
-              <a:t>2023/4/27</a:t>
+              <a:pPr/>
+              <a:t>2024/9/8</a:t>
             </a:fld>
             <a:endParaRPr lang="zh-TW" altLang="en-US"/>
           </a:p>
@@ -858,6 +865,7 @@
           <a:p>
             <a:fld id="{AD4A426F-D02E-413A-A88D-BB0531786194}" type="slidenum">
               <a:rPr lang="zh-TW" altLang="en-US" smtClean="0"/>
+              <a:pPr/>
               <a:t>‹#›</a:t>
             </a:fld>
             <a:endParaRPr lang="zh-TW" altLang="en-US"/>
@@ -1057,7 +1065,8 @@
           <a:p>
             <a:fld id="{F4DC9DE7-1299-458E-9A51-39F41637C414}" type="datetimeFigureOut">
               <a:rPr lang="zh-TW" altLang="en-US" smtClean="0"/>
-              <a:t>2023/4/27</a:t>
+              <a:pPr/>
+              <a:t>2024/9/8</a:t>
             </a:fld>
             <a:endParaRPr lang="zh-TW" altLang="en-US"/>
           </a:p>
@@ -1099,6 +1108,7 @@
           <a:p>
             <a:fld id="{AD4A426F-D02E-413A-A88D-BB0531786194}" type="slidenum">
               <a:rPr lang="zh-TW" altLang="en-US" smtClean="0"/>
+              <a:pPr/>
               <a:t>‹#›</a:t>
             </a:fld>
             <a:endParaRPr lang="zh-TW" altLang="en-US"/>
@@ -1340,7 +1350,8 @@
           <a:p>
             <a:fld id="{F4DC9DE7-1299-458E-9A51-39F41637C414}" type="datetimeFigureOut">
               <a:rPr lang="zh-TW" altLang="en-US" smtClean="0"/>
-              <a:t>2023/4/27</a:t>
+              <a:pPr/>
+              <a:t>2024/9/8</a:t>
             </a:fld>
             <a:endParaRPr lang="zh-TW" altLang="en-US"/>
           </a:p>
@@ -1382,6 +1393,7 @@
           <a:p>
             <a:fld id="{AD4A426F-D02E-413A-A88D-BB0531786194}" type="slidenum">
               <a:rPr lang="zh-TW" altLang="en-US" smtClean="0"/>
+              <a:pPr/>
               <a:t>‹#›</a:t>
             </a:fld>
             <a:endParaRPr lang="zh-TW" altLang="en-US"/>
@@ -1757,7 +1769,8 @@
           <a:p>
             <a:fld id="{F4DC9DE7-1299-458E-9A51-39F41637C414}" type="datetimeFigureOut">
               <a:rPr lang="zh-TW" altLang="en-US" smtClean="0"/>
-              <a:t>2023/4/27</a:t>
+              <a:pPr/>
+              <a:t>2024/9/8</a:t>
             </a:fld>
             <a:endParaRPr lang="zh-TW" altLang="en-US"/>
           </a:p>
@@ -1799,6 +1812,7 @@
           <a:p>
             <a:fld id="{AD4A426F-D02E-413A-A88D-BB0531786194}" type="slidenum">
               <a:rPr lang="zh-TW" altLang="en-US" smtClean="0"/>
+              <a:pPr/>
               <a:t>‹#›</a:t>
             </a:fld>
             <a:endParaRPr lang="zh-TW" altLang="en-US"/>
@@ -1870,7 +1884,8 @@
           <a:p>
             <a:fld id="{F4DC9DE7-1299-458E-9A51-39F41637C414}" type="datetimeFigureOut">
               <a:rPr lang="zh-TW" altLang="en-US" smtClean="0"/>
-              <a:t>2023/4/27</a:t>
+              <a:pPr/>
+              <a:t>2024/9/8</a:t>
             </a:fld>
             <a:endParaRPr lang="zh-TW" altLang="en-US"/>
           </a:p>
@@ -1912,6 +1927,7 @@
           <a:p>
             <a:fld id="{AD4A426F-D02E-413A-A88D-BB0531786194}" type="slidenum">
               <a:rPr lang="zh-TW" altLang="en-US" smtClean="0"/>
+              <a:pPr/>
               <a:t>‹#›</a:t>
             </a:fld>
             <a:endParaRPr lang="zh-TW" altLang="en-US"/>
@@ -1960,7 +1976,8 @@
           <a:p>
             <a:fld id="{F4DC9DE7-1299-458E-9A51-39F41637C414}" type="datetimeFigureOut">
               <a:rPr lang="zh-TW" altLang="en-US" smtClean="0"/>
-              <a:t>2023/4/27</a:t>
+              <a:pPr/>
+              <a:t>2024/9/8</a:t>
             </a:fld>
             <a:endParaRPr lang="zh-TW" altLang="en-US"/>
           </a:p>
@@ -2002,6 +2019,7 @@
           <a:p>
             <a:fld id="{AD4A426F-D02E-413A-A88D-BB0531786194}" type="slidenum">
               <a:rPr lang="zh-TW" altLang="en-US" smtClean="0"/>
+              <a:pPr/>
               <a:t>‹#›</a:t>
             </a:fld>
             <a:endParaRPr lang="zh-TW" altLang="en-US"/>
@@ -2232,7 +2250,8 @@
           <a:p>
             <a:fld id="{F4DC9DE7-1299-458E-9A51-39F41637C414}" type="datetimeFigureOut">
               <a:rPr lang="zh-TW" altLang="en-US" smtClean="0"/>
-              <a:t>2023/4/27</a:t>
+              <a:pPr/>
+              <a:t>2024/9/8</a:t>
             </a:fld>
             <a:endParaRPr lang="zh-TW" altLang="en-US"/>
           </a:p>
@@ -2274,6 +2293,7 @@
           <a:p>
             <a:fld id="{AD4A426F-D02E-413A-A88D-BB0531786194}" type="slidenum">
               <a:rPr lang="zh-TW" altLang="en-US" smtClean="0"/>
+              <a:pPr/>
               <a:t>‹#›</a:t>
             </a:fld>
             <a:endParaRPr lang="zh-TW" altLang="en-US"/>
@@ -2484,7 +2504,8 @@
           <a:p>
             <a:fld id="{F4DC9DE7-1299-458E-9A51-39F41637C414}" type="datetimeFigureOut">
               <a:rPr lang="zh-TW" altLang="en-US" smtClean="0"/>
-              <a:t>2023/4/27</a:t>
+              <a:pPr/>
+              <a:t>2024/9/8</a:t>
             </a:fld>
             <a:endParaRPr lang="zh-TW" altLang="en-US"/>
           </a:p>
@@ -2526,6 +2547,7 @@
           <a:p>
             <a:fld id="{AD4A426F-D02E-413A-A88D-BB0531786194}" type="slidenum">
               <a:rPr lang="zh-TW" altLang="en-US" smtClean="0"/>
+              <a:pPr/>
               <a:t>‹#›</a:t>
             </a:fld>
             <a:endParaRPr lang="zh-TW" altLang="en-US"/>
@@ -2697,7 +2719,8 @@
           <a:p>
             <a:fld id="{F4DC9DE7-1299-458E-9A51-39F41637C414}" type="datetimeFigureOut">
               <a:rPr lang="zh-TW" altLang="en-US" smtClean="0"/>
-              <a:t>2023/4/27</a:t>
+              <a:pPr/>
+              <a:t>2024/9/8</a:t>
             </a:fld>
             <a:endParaRPr lang="zh-TW" altLang="en-US"/>
           </a:p>
@@ -2775,6 +2798,7 @@
           <a:p>
             <a:fld id="{AD4A426F-D02E-413A-A88D-BB0531786194}" type="slidenum">
               <a:rPr lang="zh-TW" altLang="en-US" smtClean="0"/>
+              <a:pPr/>
               <a:t>‹#›</a:t>
             </a:fld>
             <a:endParaRPr lang="zh-TW" altLang="en-US"/>
@@ -3129,7 +3153,7 @@
     </p:spTree>
     <p:extLst>
       <p:ext uri="{BB962C8B-B14F-4D97-AF65-F5344CB8AC3E}">
-        <p14:creationId xmlns:p14="http://schemas.microsoft.com/office/powerpoint/2010/main" val="2184734766"/>
+        <p14:creationId xmlns:p14="http://schemas.microsoft.com/office/powerpoint/2010/main" xmlns="" val="2184734766"/>
       </p:ext>
     </p:extLst>
   </p:cSld>
@@ -3272,7 +3296,7 @@
         <p:spPr>
           <a:xfrm>
             <a:off x="0" y="3867894"/>
-            <a:ext cx="9144000" cy="584775"/>
+            <a:ext cx="9144000" cy="461665"/>
           </a:xfrm>
           <a:prstGeom prst="rect">
             <a:avLst/>
@@ -3287,7 +3311,7 @@
           <a:p>
             <a:pPr algn="ctr"/>
             <a:r>
-              <a:rPr lang="en-US" sz="3200" b="1" dirty="0" smtClean="0">
+              <a:rPr lang="en-US" sz="2400" b="1" dirty="0" smtClean="0">
                 <a:solidFill>
                   <a:srgbClr val="000066"/>
                 </a:solidFill>
@@ -3297,7 +3321,7 @@
               <a:t>( </a:t>
             </a:r>
             <a:r>
-              <a:rPr lang="zh-CN" altLang="en-US" sz="3200" b="1" dirty="0" smtClean="0">
+              <a:rPr lang="zh-CN" altLang="en-US" sz="2400" b="1" dirty="0" smtClean="0">
                 <a:solidFill>
                   <a:srgbClr val="000066"/>
                 </a:solidFill>
@@ -3307,7 +3331,7 @@
               <a:t>正</a:t>
             </a:r>
             <a:r>
-              <a:rPr lang="en-US" sz="3200" b="1" dirty="0" smtClean="0">
+              <a:rPr lang="en-US" sz="2400" b="1" dirty="0" smtClean="0">
                 <a:solidFill>
                   <a:srgbClr val="000066"/>
                 </a:solidFill>
@@ -3316,7 +3340,7 @@
               </a:rPr>
               <a:t> )</a:t>
             </a:r>
-            <a:endParaRPr lang="vi-VN" sz="3200" b="1" dirty="0">
+            <a:endParaRPr lang="vi-VN" sz="2400" b="1" dirty="0">
               <a:solidFill>
                 <a:srgbClr val="000066"/>
               </a:solidFill>
@@ -3328,7 +3352,7 @@
     </p:spTree>
     <p:extLst>
       <p:ext uri="{BB962C8B-B14F-4D97-AF65-F5344CB8AC3E}">
-        <p14:creationId xmlns:p14="http://schemas.microsoft.com/office/powerpoint/2010/main" val="1898455939"/>
+        <p14:creationId xmlns:p14="http://schemas.microsoft.com/office/powerpoint/2010/main" xmlns="" val="1898455939"/>
       </p:ext>
     </p:extLst>
   </p:cSld>
@@ -3444,7 +3468,7 @@
         <p:spPr>
           <a:xfrm>
             <a:off x="0" y="3867894"/>
-            <a:ext cx="9144000" cy="584775"/>
+            <a:ext cx="9144000" cy="461665"/>
           </a:xfrm>
           <a:prstGeom prst="rect">
             <a:avLst/>
@@ -3459,7 +3483,7 @@
           <a:p>
             <a:pPr algn="ctr"/>
             <a:r>
-              <a:rPr lang="en-US" sz="3200" b="1" dirty="0" smtClean="0">
+              <a:rPr lang="en-US" sz="2400" b="1" dirty="0" smtClean="0">
                 <a:solidFill>
                   <a:srgbClr val="000066"/>
                 </a:solidFill>
@@ -3469,7 +3493,7 @@
               <a:t>( </a:t>
             </a:r>
             <a:r>
-              <a:rPr lang="zh-CN" altLang="en-US" sz="3200" b="1" dirty="0" smtClean="0">
+              <a:rPr lang="zh-CN" altLang="en-US" sz="2400" b="1" dirty="0" smtClean="0">
                 <a:solidFill>
                   <a:srgbClr val="000066"/>
                 </a:solidFill>
@@ -3479,7 +3503,7 @@
               <a:t>正</a:t>
             </a:r>
             <a:r>
-              <a:rPr lang="en-US" sz="3200" b="1" dirty="0" smtClean="0">
+              <a:rPr lang="en-US" sz="2400" b="1" dirty="0" smtClean="0">
                 <a:solidFill>
                   <a:srgbClr val="000066"/>
                 </a:solidFill>
@@ -3488,10 +3512,11 @@
               </a:rPr>
               <a:t> )</a:t>
             </a:r>
-            <a:endParaRPr lang="vi-VN" sz="3200" b="1" dirty="0">
+            <a:endParaRPr lang="vi-VN" sz="2400" b="1" dirty="0">
               <a:solidFill>
                 <a:srgbClr val="000066"/>
               </a:solidFill>
+              <a:latin typeface="Microsoft JhengHei" panose="020B0604030504040204" pitchFamily="34" charset="-120"/>
               <a:ea typeface="Microsoft JhengHei" panose="020B0604030504040204" pitchFamily="34" charset="-120"/>
             </a:endParaRPr>
           </a:p>
@@ -3500,7 +3525,7 @@
     </p:spTree>
     <p:extLst>
       <p:ext uri="{BB962C8B-B14F-4D97-AF65-F5344CB8AC3E}">
-        <p14:creationId xmlns:p14="http://schemas.microsoft.com/office/powerpoint/2010/main" val="625573592"/>
+        <p14:creationId xmlns:p14="http://schemas.microsoft.com/office/powerpoint/2010/main" xmlns="" val="625573592"/>
       </p:ext>
     </p:extLst>
   </p:cSld>
@@ -3629,7 +3654,7 @@
         <p:spPr>
           <a:xfrm>
             <a:off x="0" y="3867894"/>
-            <a:ext cx="9144000" cy="584775"/>
+            <a:ext cx="9144000" cy="461665"/>
           </a:xfrm>
           <a:prstGeom prst="rect">
             <a:avLst/>
@@ -3644,7 +3669,7 @@
           <a:p>
             <a:pPr algn="ctr"/>
             <a:r>
-              <a:rPr lang="en-US" sz="3200" b="1" dirty="0" smtClean="0">
+              <a:rPr lang="en-US" sz="2400" b="1" dirty="0" smtClean="0">
                 <a:solidFill>
                   <a:srgbClr val="000066"/>
                 </a:solidFill>
@@ -3654,7 +3679,7 @@
               <a:t>( </a:t>
             </a:r>
             <a:r>
-              <a:rPr lang="zh-CN" altLang="en-US" sz="3200" b="1" dirty="0" smtClean="0">
+              <a:rPr lang="zh-CN" altLang="en-US" sz="2400" b="1" dirty="0" smtClean="0">
                 <a:solidFill>
                   <a:srgbClr val="000066"/>
                 </a:solidFill>
@@ -3664,7 +3689,7 @@
               <a:t>正</a:t>
             </a:r>
             <a:r>
-              <a:rPr lang="en-US" sz="3200" b="1" dirty="0" smtClean="0">
+              <a:rPr lang="en-US" sz="2400" b="1" dirty="0" smtClean="0">
                 <a:solidFill>
                   <a:srgbClr val="000066"/>
                 </a:solidFill>
@@ -3673,10 +3698,11 @@
               </a:rPr>
               <a:t> )</a:t>
             </a:r>
-            <a:endParaRPr lang="vi-VN" sz="3200" b="1" dirty="0">
+            <a:endParaRPr lang="vi-VN" sz="2400" b="1" dirty="0">
               <a:solidFill>
                 <a:srgbClr val="000066"/>
               </a:solidFill>
+              <a:latin typeface="Microsoft JhengHei" panose="020B0604030504040204" pitchFamily="34" charset="-120"/>
               <a:ea typeface="Microsoft JhengHei" panose="020B0604030504040204" pitchFamily="34" charset="-120"/>
             </a:endParaRPr>
           </a:p>
@@ -3685,7 +3711,7 @@
     </p:spTree>
     <p:extLst>
       <p:ext uri="{BB962C8B-B14F-4D97-AF65-F5344CB8AC3E}">
-        <p14:creationId xmlns:p14="http://schemas.microsoft.com/office/powerpoint/2010/main" val="2179620692"/>
+        <p14:creationId xmlns:p14="http://schemas.microsoft.com/office/powerpoint/2010/main" xmlns="" val="2179620692"/>
       </p:ext>
     </p:extLst>
   </p:cSld>
@@ -3808,7 +3834,7 @@
         <p:spPr>
           <a:xfrm>
             <a:off x="0" y="3867894"/>
-            <a:ext cx="9144000" cy="584775"/>
+            <a:ext cx="9144000" cy="461665"/>
           </a:xfrm>
           <a:prstGeom prst="rect">
             <a:avLst/>
@@ -3823,7 +3849,7 @@
           <a:p>
             <a:pPr algn="ctr"/>
             <a:r>
-              <a:rPr lang="en-US" sz="3200" b="1" dirty="0" smtClean="0">
+              <a:rPr lang="en-US" sz="2400" b="1" dirty="0" smtClean="0">
                 <a:solidFill>
                   <a:srgbClr val="000066"/>
                 </a:solidFill>
@@ -3833,7 +3859,7 @@
               <a:t>( </a:t>
             </a:r>
             <a:r>
-              <a:rPr lang="zh-CN" altLang="en-US" sz="3200" b="1" dirty="0" smtClean="0">
+              <a:rPr lang="zh-CN" altLang="en-US" sz="2400" b="1" dirty="0" smtClean="0">
                 <a:solidFill>
                   <a:srgbClr val="000066"/>
                 </a:solidFill>
@@ -3843,7 +3869,7 @@
               <a:t>正</a:t>
             </a:r>
             <a:r>
-              <a:rPr lang="en-US" sz="3200" b="1" dirty="0" smtClean="0">
+              <a:rPr lang="en-US" sz="2400" b="1" dirty="0" smtClean="0">
                 <a:solidFill>
                   <a:srgbClr val="000066"/>
                 </a:solidFill>
@@ -3852,10 +3878,11 @@
               </a:rPr>
               <a:t> )</a:t>
             </a:r>
-            <a:endParaRPr lang="vi-VN" sz="3200" b="1" dirty="0">
+            <a:endParaRPr lang="vi-VN" sz="2400" b="1" dirty="0">
               <a:solidFill>
                 <a:srgbClr val="000066"/>
               </a:solidFill>
+              <a:latin typeface="Microsoft JhengHei" panose="020B0604030504040204" pitchFamily="34" charset="-120"/>
               <a:ea typeface="Microsoft JhengHei" panose="020B0604030504040204" pitchFamily="34" charset="-120"/>
             </a:endParaRPr>
           </a:p>
@@ -3864,7 +3891,7 @@
     </p:spTree>
     <p:extLst>
       <p:ext uri="{BB962C8B-B14F-4D97-AF65-F5344CB8AC3E}">
-        <p14:creationId xmlns:p14="http://schemas.microsoft.com/office/powerpoint/2010/main" val="2327894863"/>
+        <p14:creationId xmlns:p14="http://schemas.microsoft.com/office/powerpoint/2010/main" xmlns="" val="2327894863"/>
       </p:ext>
     </p:extLst>
   </p:cSld>
@@ -4077,7 +4104,7 @@
         <p:spPr>
           <a:xfrm>
             <a:off x="0" y="3867894"/>
-            <a:ext cx="9144000" cy="584775"/>
+            <a:ext cx="9144000" cy="461665"/>
           </a:xfrm>
           <a:prstGeom prst="rect">
             <a:avLst/>
@@ -4092,7 +4119,7 @@
           <a:p>
             <a:pPr algn="ctr"/>
             <a:r>
-              <a:rPr lang="en-US" sz="3200" b="1" dirty="0" smtClean="0">
+              <a:rPr lang="en-US" sz="2400" b="1" dirty="0" smtClean="0">
                 <a:solidFill>
                   <a:srgbClr val="000066"/>
                 </a:solidFill>
@@ -4102,7 +4129,7 @@
               <a:t>( </a:t>
             </a:r>
             <a:r>
-              <a:rPr lang="zh-CN" altLang="en-US" sz="3200" b="1" dirty="0" smtClean="0">
+              <a:rPr lang="zh-CN" altLang="en-US" sz="2400" b="1" dirty="0" smtClean="0">
                 <a:solidFill>
                   <a:srgbClr val="000066"/>
                 </a:solidFill>
@@ -4112,7 +4139,7 @@
               <a:t>副</a:t>
             </a:r>
             <a:r>
-              <a:rPr lang="en-US" sz="3200" b="1" dirty="0" smtClean="0">
+              <a:rPr lang="en-US" sz="2400" b="1" dirty="0" smtClean="0">
                 <a:solidFill>
                   <a:srgbClr val="000066"/>
                 </a:solidFill>
@@ -4121,10 +4148,11 @@
               </a:rPr>
               <a:t> )</a:t>
             </a:r>
-            <a:endParaRPr lang="vi-VN" sz="3200" b="1" dirty="0">
+            <a:endParaRPr lang="vi-VN" sz="2400" b="1" dirty="0">
               <a:solidFill>
                 <a:srgbClr val="000066"/>
               </a:solidFill>
+              <a:latin typeface="Microsoft JhengHei" panose="020B0604030504040204" pitchFamily="34" charset="-120"/>
               <a:ea typeface="Microsoft JhengHei" panose="020B0604030504040204" pitchFamily="34" charset="-120"/>
             </a:endParaRPr>
           </a:p>
@@ -4133,7 +4161,7 @@
     </p:spTree>
     <p:extLst>
       <p:ext uri="{BB962C8B-B14F-4D97-AF65-F5344CB8AC3E}">
-        <p14:creationId xmlns:p14="http://schemas.microsoft.com/office/powerpoint/2010/main" val="3225736631"/>
+        <p14:creationId xmlns:p14="http://schemas.microsoft.com/office/powerpoint/2010/main" xmlns="" val="3225736631"/>
       </p:ext>
     </p:extLst>
   </p:cSld>
@@ -4239,7 +4267,7 @@
         <p:spPr>
           <a:xfrm>
             <a:off x="0" y="3867894"/>
-            <a:ext cx="9144000" cy="584775"/>
+            <a:ext cx="9144000" cy="461665"/>
           </a:xfrm>
           <a:prstGeom prst="rect">
             <a:avLst/>
@@ -4254,7 +4282,7 @@
           <a:p>
             <a:pPr algn="ctr"/>
             <a:r>
-              <a:rPr lang="en-US" sz="3200" b="1" dirty="0" smtClean="0">
+              <a:rPr lang="en-US" sz="2400" b="1" dirty="0" smtClean="0">
                 <a:solidFill>
                   <a:srgbClr val="000066"/>
                 </a:solidFill>
@@ -4264,7 +4292,7 @@
               <a:t>( </a:t>
             </a:r>
             <a:r>
-              <a:rPr lang="zh-CN" altLang="en-US" sz="3200" b="1" dirty="0" smtClean="0">
+              <a:rPr lang="zh-CN" altLang="en-US" sz="2400" b="1" dirty="0" smtClean="0">
                 <a:solidFill>
                   <a:srgbClr val="000066"/>
                 </a:solidFill>
@@ -4274,7 +4302,7 @@
               <a:t>副</a:t>
             </a:r>
             <a:r>
-              <a:rPr lang="en-US" sz="3200" b="1" dirty="0" smtClean="0">
+              <a:rPr lang="en-US" sz="2400" b="1" dirty="0" smtClean="0">
                 <a:solidFill>
                   <a:srgbClr val="000066"/>
                 </a:solidFill>
@@ -4283,10 +4311,11 @@
               </a:rPr>
               <a:t> )</a:t>
             </a:r>
-            <a:endParaRPr lang="vi-VN" sz="3200" b="1" dirty="0">
+            <a:endParaRPr lang="vi-VN" sz="2400" b="1" dirty="0">
               <a:solidFill>
                 <a:srgbClr val="000066"/>
               </a:solidFill>
+              <a:latin typeface="Microsoft JhengHei" panose="020B0604030504040204" pitchFamily="34" charset="-120"/>
               <a:ea typeface="Microsoft JhengHei" panose="020B0604030504040204" pitchFamily="34" charset="-120"/>
             </a:endParaRPr>
           </a:p>
@@ -4295,7 +4324,7 @@
     </p:spTree>
     <p:extLst>
       <p:ext uri="{BB962C8B-B14F-4D97-AF65-F5344CB8AC3E}">
-        <p14:creationId xmlns:p14="http://schemas.microsoft.com/office/powerpoint/2010/main" val="1730094437"/>
+        <p14:creationId xmlns:p14="http://schemas.microsoft.com/office/powerpoint/2010/main" xmlns="" val="1730094437"/>
       </p:ext>
     </p:extLst>
   </p:cSld>
@@ -4369,7 +4398,7 @@
         <p:spPr>
           <a:xfrm>
             <a:off x="0" y="3867894"/>
-            <a:ext cx="9144000" cy="584775"/>
+            <a:ext cx="9144000" cy="461665"/>
           </a:xfrm>
           <a:prstGeom prst="rect">
             <a:avLst/>
@@ -4384,7 +4413,7 @@
           <a:p>
             <a:pPr algn="ctr"/>
             <a:r>
-              <a:rPr lang="en-US" sz="3200" b="1" dirty="0" smtClean="0">
+              <a:rPr lang="en-US" sz="2400" b="1" dirty="0" smtClean="0">
                 <a:solidFill>
                   <a:srgbClr val="000066"/>
                 </a:solidFill>
@@ -4394,7 +4423,7 @@
               <a:t>( </a:t>
             </a:r>
             <a:r>
-              <a:rPr lang="zh-CN" altLang="en-US" sz="3200" b="1" dirty="0" smtClean="0">
+              <a:rPr lang="zh-CN" altLang="en-US" sz="2400" b="1" dirty="0" smtClean="0">
                 <a:solidFill>
                   <a:srgbClr val="000066"/>
                 </a:solidFill>
@@ -4404,7 +4433,7 @@
               <a:t>副</a:t>
             </a:r>
             <a:r>
-              <a:rPr lang="en-US" sz="3200" b="1" dirty="0" smtClean="0">
+              <a:rPr lang="en-US" sz="2400" b="1" dirty="0" smtClean="0">
                 <a:solidFill>
                   <a:srgbClr val="000066"/>
                 </a:solidFill>
@@ -4413,10 +4442,11 @@
               </a:rPr>
               <a:t> )</a:t>
             </a:r>
-            <a:endParaRPr lang="vi-VN" sz="3200" b="1" dirty="0">
+            <a:endParaRPr lang="vi-VN" sz="2400" b="1" dirty="0">
               <a:solidFill>
                 <a:srgbClr val="000066"/>
               </a:solidFill>
+              <a:latin typeface="Microsoft JhengHei" panose="020B0604030504040204" pitchFamily="34" charset="-120"/>
               <a:ea typeface="Microsoft JhengHei" panose="020B0604030504040204" pitchFamily="34" charset="-120"/>
             </a:endParaRPr>
           </a:p>
@@ -4425,7 +4455,7 @@
     </p:spTree>
     <p:extLst>
       <p:ext uri="{BB962C8B-B14F-4D97-AF65-F5344CB8AC3E}">
-        <p14:creationId xmlns:p14="http://schemas.microsoft.com/office/powerpoint/2010/main" val="640735095"/>
+        <p14:creationId xmlns:p14="http://schemas.microsoft.com/office/powerpoint/2010/main" xmlns="" val="640735095"/>
       </p:ext>
     </p:extLst>
   </p:cSld>

--- a/我要全心讚美.pptx
+++ b/我要全心讚美.pptx
@@ -113,7 +113,7 @@
   </p:defaultTextStyle>
   <p:extLst>
     <p:ext uri="{EFAFB233-063F-42B5-8137-9DF3F51BA10A}">
-      <p15:sldGuideLst xmlns:p15="http://schemas.microsoft.com/office/powerpoint/2012/main" xmlns="">
+      <p15:sldGuideLst xmlns:p15="http://schemas.microsoft.com/office/powerpoint/2012/main">
         <p15:guide id="1" orient="horz" pos="1620">
           <p15:clr>
             <a:srgbClr val="A4A3A4"/>
@@ -168,10 +168,9 @@
           <a:lstStyle/>
           <a:p>
             <a:r>
-              <a:rPr lang="zh-TW" altLang="en-US" smtClean="0"/>
+              <a:rPr lang="zh-TW" altLang="en-US"/>
               <a:t>按一下以編輯母片標題樣式</a:t>
             </a:r>
-            <a:endParaRPr lang="zh-TW" altLang="en-US"/>
           </a:p>
         </p:txBody>
       </p:sp>
@@ -287,10 +286,9 @@
           </a:lstStyle>
           <a:p>
             <a:r>
-              <a:rPr lang="zh-TW" altLang="en-US" smtClean="0"/>
+              <a:rPr lang="zh-TW" altLang="en-US"/>
               <a:t>按一下以編輯母片副標題樣式</a:t>
             </a:r>
-            <a:endParaRPr lang="zh-TW" altLang="en-US"/>
           </a:p>
         </p:txBody>
       </p:sp>
@@ -312,7 +310,7 @@
             <a:fld id="{F4DC9DE7-1299-458E-9A51-39F41637C414}" type="datetimeFigureOut">
               <a:rPr lang="zh-TW" altLang="en-US" smtClean="0"/>
               <a:pPr/>
-              <a:t>2024/9/8</a:t>
+              <a:t>2026/1/24</a:t>
             </a:fld>
             <a:endParaRPr lang="zh-TW" altLang="en-US"/>
           </a:p>
@@ -402,10 +400,9 @@
           <a:lstStyle/>
           <a:p>
             <a:r>
-              <a:rPr lang="zh-TW" altLang="en-US" smtClean="0"/>
+              <a:rPr lang="zh-TW" altLang="en-US"/>
               <a:t>按一下以編輯母片標題樣式</a:t>
             </a:r>
-            <a:endParaRPr lang="zh-TW" altLang="en-US"/>
           </a:p>
         </p:txBody>
       </p:sp>
@@ -426,38 +423,37 @@
           <a:p>
             <a:pPr lvl="0"/>
             <a:r>
-              <a:rPr lang="zh-TW" altLang="en-US" smtClean="0"/>
+              <a:rPr lang="zh-TW" altLang="en-US"/>
               <a:t>按一下以編輯母片文字樣式</a:t>
             </a:r>
           </a:p>
           <a:p>
             <a:pPr lvl="1"/>
             <a:r>
-              <a:rPr lang="zh-TW" altLang="en-US" smtClean="0"/>
+              <a:rPr lang="zh-TW" altLang="en-US"/>
               <a:t>第二層</a:t>
             </a:r>
           </a:p>
           <a:p>
             <a:pPr lvl="2"/>
             <a:r>
-              <a:rPr lang="zh-TW" altLang="en-US" smtClean="0"/>
+              <a:rPr lang="zh-TW" altLang="en-US"/>
               <a:t>第三層</a:t>
             </a:r>
           </a:p>
           <a:p>
             <a:pPr lvl="3"/>
             <a:r>
-              <a:rPr lang="zh-TW" altLang="en-US" smtClean="0"/>
+              <a:rPr lang="zh-TW" altLang="en-US"/>
               <a:t>第四層</a:t>
             </a:r>
           </a:p>
           <a:p>
             <a:pPr lvl="4"/>
             <a:r>
-              <a:rPr lang="zh-TW" altLang="en-US" smtClean="0"/>
+              <a:rPr lang="zh-TW" altLang="en-US"/>
               <a:t>第五層</a:t>
             </a:r>
-            <a:endParaRPr lang="zh-TW" altLang="en-US"/>
           </a:p>
         </p:txBody>
       </p:sp>
@@ -479,7 +475,7 @@
             <a:fld id="{F4DC9DE7-1299-458E-9A51-39F41637C414}" type="datetimeFigureOut">
               <a:rPr lang="zh-TW" altLang="en-US" smtClean="0"/>
               <a:pPr/>
-              <a:t>2024/9/8</a:t>
+              <a:t>2026/1/24</a:t>
             </a:fld>
             <a:endParaRPr lang="zh-TW" altLang="en-US"/>
           </a:p>
@@ -574,10 +570,9 @@
           <a:lstStyle/>
           <a:p>
             <a:r>
-              <a:rPr lang="zh-TW" altLang="en-US" smtClean="0"/>
+              <a:rPr lang="zh-TW" altLang="en-US"/>
               <a:t>按一下以編輯母片標題樣式</a:t>
             </a:r>
-            <a:endParaRPr lang="zh-TW" altLang="en-US"/>
           </a:p>
         </p:txBody>
       </p:sp>
@@ -603,38 +598,37 @@
           <a:p>
             <a:pPr lvl="0"/>
             <a:r>
-              <a:rPr lang="zh-TW" altLang="en-US" smtClean="0"/>
+              <a:rPr lang="zh-TW" altLang="en-US"/>
               <a:t>按一下以編輯母片文字樣式</a:t>
             </a:r>
           </a:p>
           <a:p>
             <a:pPr lvl="1"/>
             <a:r>
-              <a:rPr lang="zh-TW" altLang="en-US" smtClean="0"/>
+              <a:rPr lang="zh-TW" altLang="en-US"/>
               <a:t>第二層</a:t>
             </a:r>
           </a:p>
           <a:p>
             <a:pPr lvl="2"/>
             <a:r>
-              <a:rPr lang="zh-TW" altLang="en-US" smtClean="0"/>
+              <a:rPr lang="zh-TW" altLang="en-US"/>
               <a:t>第三層</a:t>
             </a:r>
           </a:p>
           <a:p>
             <a:pPr lvl="3"/>
             <a:r>
-              <a:rPr lang="zh-TW" altLang="en-US" smtClean="0"/>
+              <a:rPr lang="zh-TW" altLang="en-US"/>
               <a:t>第四層</a:t>
             </a:r>
           </a:p>
           <a:p>
             <a:pPr lvl="4"/>
             <a:r>
-              <a:rPr lang="zh-TW" altLang="en-US" smtClean="0"/>
+              <a:rPr lang="zh-TW" altLang="en-US"/>
               <a:t>第五層</a:t>
             </a:r>
-            <a:endParaRPr lang="zh-TW" altLang="en-US"/>
           </a:p>
         </p:txBody>
       </p:sp>
@@ -656,7 +650,7 @@
             <a:fld id="{F4DC9DE7-1299-458E-9A51-39F41637C414}" type="datetimeFigureOut">
               <a:rPr lang="zh-TW" altLang="en-US" smtClean="0"/>
               <a:pPr/>
-              <a:t>2024/9/8</a:t>
+              <a:t>2026/1/24</a:t>
             </a:fld>
             <a:endParaRPr lang="zh-TW" altLang="en-US"/>
           </a:p>
@@ -746,10 +740,9 @@
           <a:lstStyle/>
           <a:p>
             <a:r>
-              <a:rPr lang="zh-TW" altLang="en-US" smtClean="0"/>
+              <a:rPr lang="zh-TW" altLang="en-US"/>
               <a:t>按一下以編輯母片標題樣式</a:t>
             </a:r>
-            <a:endParaRPr lang="zh-TW" altLang="en-US"/>
           </a:p>
         </p:txBody>
       </p:sp>
@@ -770,38 +763,37 @@
           <a:p>
             <a:pPr lvl="0"/>
             <a:r>
-              <a:rPr lang="zh-TW" altLang="en-US" smtClean="0"/>
+              <a:rPr lang="zh-TW" altLang="en-US"/>
               <a:t>按一下以編輯母片文字樣式</a:t>
             </a:r>
           </a:p>
           <a:p>
             <a:pPr lvl="1"/>
             <a:r>
-              <a:rPr lang="zh-TW" altLang="en-US" smtClean="0"/>
+              <a:rPr lang="zh-TW" altLang="en-US"/>
               <a:t>第二層</a:t>
             </a:r>
           </a:p>
           <a:p>
             <a:pPr lvl="2"/>
             <a:r>
-              <a:rPr lang="zh-TW" altLang="en-US" smtClean="0"/>
+              <a:rPr lang="zh-TW" altLang="en-US"/>
               <a:t>第三層</a:t>
             </a:r>
           </a:p>
           <a:p>
             <a:pPr lvl="3"/>
             <a:r>
-              <a:rPr lang="zh-TW" altLang="en-US" smtClean="0"/>
+              <a:rPr lang="zh-TW" altLang="en-US"/>
               <a:t>第四層</a:t>
             </a:r>
           </a:p>
           <a:p>
             <a:pPr lvl="4"/>
             <a:r>
-              <a:rPr lang="zh-TW" altLang="en-US" smtClean="0"/>
+              <a:rPr lang="zh-TW" altLang="en-US"/>
               <a:t>第五層</a:t>
             </a:r>
-            <a:endParaRPr lang="zh-TW" altLang="en-US"/>
           </a:p>
         </p:txBody>
       </p:sp>
@@ -823,7 +815,7 @@
             <a:fld id="{F4DC9DE7-1299-458E-9A51-39F41637C414}" type="datetimeFigureOut">
               <a:rPr lang="zh-TW" altLang="en-US" smtClean="0"/>
               <a:pPr/>
-              <a:t>2024/9/8</a:t>
+              <a:t>2026/1/24</a:t>
             </a:fld>
             <a:endParaRPr lang="zh-TW" altLang="en-US"/>
           </a:p>
@@ -922,10 +914,9 @@
           </a:lstStyle>
           <a:p>
             <a:r>
-              <a:rPr lang="zh-TW" altLang="en-US" smtClean="0"/>
+              <a:rPr lang="zh-TW" altLang="en-US"/>
               <a:t>按一下以編輯母片標題樣式</a:t>
             </a:r>
-            <a:endParaRPr lang="zh-TW" altLang="en-US"/>
           </a:p>
         </p:txBody>
       </p:sp>
@@ -1042,7 +1033,7 @@
           <a:p>
             <a:pPr lvl="0"/>
             <a:r>
-              <a:rPr lang="zh-TW" altLang="en-US" smtClean="0"/>
+              <a:rPr lang="zh-TW" altLang="en-US"/>
               <a:t>按一下以編輯母片文字樣式</a:t>
             </a:r>
           </a:p>
@@ -1066,7 +1057,7 @@
             <a:fld id="{F4DC9DE7-1299-458E-9A51-39F41637C414}" type="datetimeFigureOut">
               <a:rPr lang="zh-TW" altLang="en-US" smtClean="0"/>
               <a:pPr/>
-              <a:t>2024/9/8</a:t>
+              <a:t>2026/1/24</a:t>
             </a:fld>
             <a:endParaRPr lang="zh-TW" altLang="en-US"/>
           </a:p>
@@ -1156,10 +1147,9 @@
           <a:lstStyle/>
           <a:p>
             <a:r>
-              <a:rPr lang="zh-TW" altLang="en-US" smtClean="0"/>
+              <a:rPr lang="zh-TW" altLang="en-US"/>
               <a:t>按一下以編輯母片標題樣式</a:t>
             </a:r>
-            <a:endParaRPr lang="zh-TW" altLang="en-US"/>
           </a:p>
         </p:txBody>
       </p:sp>
@@ -1213,38 +1203,37 @@
           <a:p>
             <a:pPr lvl="0"/>
             <a:r>
-              <a:rPr lang="zh-TW" altLang="en-US" smtClean="0"/>
+              <a:rPr lang="zh-TW" altLang="en-US"/>
               <a:t>按一下以編輯母片文字樣式</a:t>
             </a:r>
           </a:p>
           <a:p>
             <a:pPr lvl="1"/>
             <a:r>
-              <a:rPr lang="zh-TW" altLang="en-US" smtClean="0"/>
+              <a:rPr lang="zh-TW" altLang="en-US"/>
               <a:t>第二層</a:t>
             </a:r>
           </a:p>
           <a:p>
             <a:pPr lvl="2"/>
             <a:r>
-              <a:rPr lang="zh-TW" altLang="en-US" smtClean="0"/>
+              <a:rPr lang="zh-TW" altLang="en-US"/>
               <a:t>第三層</a:t>
             </a:r>
           </a:p>
           <a:p>
             <a:pPr lvl="3"/>
             <a:r>
-              <a:rPr lang="zh-TW" altLang="en-US" smtClean="0"/>
+              <a:rPr lang="zh-TW" altLang="en-US"/>
               <a:t>第四層</a:t>
             </a:r>
           </a:p>
           <a:p>
             <a:pPr lvl="4"/>
             <a:r>
-              <a:rPr lang="zh-TW" altLang="en-US" smtClean="0"/>
+              <a:rPr lang="zh-TW" altLang="en-US"/>
               <a:t>第五層</a:t>
             </a:r>
-            <a:endParaRPr lang="zh-TW" altLang="en-US"/>
           </a:p>
         </p:txBody>
       </p:sp>
@@ -1298,38 +1287,37 @@
           <a:p>
             <a:pPr lvl="0"/>
             <a:r>
-              <a:rPr lang="zh-TW" altLang="en-US" smtClean="0"/>
+              <a:rPr lang="zh-TW" altLang="en-US"/>
               <a:t>按一下以編輯母片文字樣式</a:t>
             </a:r>
           </a:p>
           <a:p>
             <a:pPr lvl="1"/>
             <a:r>
-              <a:rPr lang="zh-TW" altLang="en-US" smtClean="0"/>
+              <a:rPr lang="zh-TW" altLang="en-US"/>
               <a:t>第二層</a:t>
             </a:r>
           </a:p>
           <a:p>
             <a:pPr lvl="2"/>
             <a:r>
-              <a:rPr lang="zh-TW" altLang="en-US" smtClean="0"/>
+              <a:rPr lang="zh-TW" altLang="en-US"/>
               <a:t>第三層</a:t>
             </a:r>
           </a:p>
           <a:p>
             <a:pPr lvl="3"/>
             <a:r>
-              <a:rPr lang="zh-TW" altLang="en-US" smtClean="0"/>
+              <a:rPr lang="zh-TW" altLang="en-US"/>
               <a:t>第四層</a:t>
             </a:r>
           </a:p>
           <a:p>
             <a:pPr lvl="4"/>
             <a:r>
-              <a:rPr lang="zh-TW" altLang="en-US" smtClean="0"/>
+              <a:rPr lang="zh-TW" altLang="en-US"/>
               <a:t>第五層</a:t>
             </a:r>
-            <a:endParaRPr lang="zh-TW" altLang="en-US"/>
           </a:p>
         </p:txBody>
       </p:sp>
@@ -1351,7 +1339,7 @@
             <a:fld id="{F4DC9DE7-1299-458E-9A51-39F41637C414}" type="datetimeFigureOut">
               <a:rPr lang="zh-TW" altLang="en-US" smtClean="0"/>
               <a:pPr/>
-              <a:t>2024/9/8</a:t>
+              <a:t>2026/1/24</a:t>
             </a:fld>
             <a:endParaRPr lang="zh-TW" altLang="en-US"/>
           </a:p>
@@ -1445,10 +1433,9 @@
           </a:lstStyle>
           <a:p>
             <a:r>
-              <a:rPr lang="zh-TW" altLang="en-US" smtClean="0"/>
+              <a:rPr lang="zh-TW" altLang="en-US"/>
               <a:t>按一下以編輯母片標題樣式</a:t>
             </a:r>
-            <a:endParaRPr lang="zh-TW" altLang="en-US"/>
           </a:p>
         </p:txBody>
       </p:sp>
@@ -1511,7 +1498,7 @@
           <a:p>
             <a:pPr lvl="0"/>
             <a:r>
-              <a:rPr lang="zh-TW" altLang="en-US" smtClean="0"/>
+              <a:rPr lang="zh-TW" altLang="en-US"/>
               <a:t>按一下以編輯母片文字樣式</a:t>
             </a:r>
           </a:p>
@@ -1567,38 +1554,37 @@
           <a:p>
             <a:pPr lvl="0"/>
             <a:r>
-              <a:rPr lang="zh-TW" altLang="en-US" smtClean="0"/>
+              <a:rPr lang="zh-TW" altLang="en-US"/>
               <a:t>按一下以編輯母片文字樣式</a:t>
             </a:r>
           </a:p>
           <a:p>
             <a:pPr lvl="1"/>
             <a:r>
-              <a:rPr lang="zh-TW" altLang="en-US" smtClean="0"/>
+              <a:rPr lang="zh-TW" altLang="en-US"/>
               <a:t>第二層</a:t>
             </a:r>
           </a:p>
           <a:p>
             <a:pPr lvl="2"/>
             <a:r>
-              <a:rPr lang="zh-TW" altLang="en-US" smtClean="0"/>
+              <a:rPr lang="zh-TW" altLang="en-US"/>
               <a:t>第三層</a:t>
             </a:r>
           </a:p>
           <a:p>
             <a:pPr lvl="3"/>
             <a:r>
-              <a:rPr lang="zh-TW" altLang="en-US" smtClean="0"/>
+              <a:rPr lang="zh-TW" altLang="en-US"/>
               <a:t>第四層</a:t>
             </a:r>
           </a:p>
           <a:p>
             <a:pPr lvl="4"/>
             <a:r>
-              <a:rPr lang="zh-TW" altLang="en-US" smtClean="0"/>
+              <a:rPr lang="zh-TW" altLang="en-US"/>
               <a:t>第五層</a:t>
             </a:r>
-            <a:endParaRPr lang="zh-TW" altLang="en-US"/>
           </a:p>
         </p:txBody>
       </p:sp>
@@ -1661,7 +1647,7 @@
           <a:p>
             <a:pPr lvl="0"/>
             <a:r>
-              <a:rPr lang="zh-TW" altLang="en-US" smtClean="0"/>
+              <a:rPr lang="zh-TW" altLang="en-US"/>
               <a:t>按一下以編輯母片文字樣式</a:t>
             </a:r>
           </a:p>
@@ -1717,38 +1703,37 @@
           <a:p>
             <a:pPr lvl="0"/>
             <a:r>
-              <a:rPr lang="zh-TW" altLang="en-US" smtClean="0"/>
+              <a:rPr lang="zh-TW" altLang="en-US"/>
               <a:t>按一下以編輯母片文字樣式</a:t>
             </a:r>
           </a:p>
           <a:p>
             <a:pPr lvl="1"/>
             <a:r>
-              <a:rPr lang="zh-TW" altLang="en-US" smtClean="0"/>
+              <a:rPr lang="zh-TW" altLang="en-US"/>
               <a:t>第二層</a:t>
             </a:r>
           </a:p>
           <a:p>
             <a:pPr lvl="2"/>
             <a:r>
-              <a:rPr lang="zh-TW" altLang="en-US" smtClean="0"/>
+              <a:rPr lang="zh-TW" altLang="en-US"/>
               <a:t>第三層</a:t>
             </a:r>
           </a:p>
           <a:p>
             <a:pPr lvl="3"/>
             <a:r>
-              <a:rPr lang="zh-TW" altLang="en-US" smtClean="0"/>
+              <a:rPr lang="zh-TW" altLang="en-US"/>
               <a:t>第四層</a:t>
             </a:r>
           </a:p>
           <a:p>
             <a:pPr lvl="4"/>
             <a:r>
-              <a:rPr lang="zh-TW" altLang="en-US" smtClean="0"/>
+              <a:rPr lang="zh-TW" altLang="en-US"/>
               <a:t>第五層</a:t>
             </a:r>
-            <a:endParaRPr lang="zh-TW" altLang="en-US"/>
           </a:p>
         </p:txBody>
       </p:sp>
@@ -1770,7 +1755,7 @@
             <a:fld id="{F4DC9DE7-1299-458E-9A51-39F41637C414}" type="datetimeFigureOut">
               <a:rPr lang="zh-TW" altLang="en-US" smtClean="0"/>
               <a:pPr/>
-              <a:t>2024/9/8</a:t>
+              <a:t>2026/1/24</a:t>
             </a:fld>
             <a:endParaRPr lang="zh-TW" altLang="en-US"/>
           </a:p>
@@ -1860,10 +1845,9 @@
           <a:lstStyle/>
           <a:p>
             <a:r>
-              <a:rPr lang="zh-TW" altLang="en-US" smtClean="0"/>
+              <a:rPr lang="zh-TW" altLang="en-US"/>
               <a:t>按一下以編輯母片標題樣式</a:t>
             </a:r>
-            <a:endParaRPr lang="zh-TW" altLang="en-US"/>
           </a:p>
         </p:txBody>
       </p:sp>
@@ -1885,7 +1869,7 @@
             <a:fld id="{F4DC9DE7-1299-458E-9A51-39F41637C414}" type="datetimeFigureOut">
               <a:rPr lang="zh-TW" altLang="en-US" smtClean="0"/>
               <a:pPr/>
-              <a:t>2024/9/8</a:t>
+              <a:t>2026/1/24</a:t>
             </a:fld>
             <a:endParaRPr lang="zh-TW" altLang="en-US"/>
           </a:p>
@@ -1977,7 +1961,7 @@
             <a:fld id="{F4DC9DE7-1299-458E-9A51-39F41637C414}" type="datetimeFigureOut">
               <a:rPr lang="zh-TW" altLang="en-US" smtClean="0"/>
               <a:pPr/>
-              <a:t>2024/9/8</a:t>
+              <a:t>2026/1/24</a:t>
             </a:fld>
             <a:endParaRPr lang="zh-TW" altLang="en-US"/>
           </a:p>
@@ -2076,10 +2060,9 @@
           </a:lstStyle>
           <a:p>
             <a:r>
-              <a:rPr lang="zh-TW" altLang="en-US" smtClean="0"/>
+              <a:rPr lang="zh-TW" altLang="en-US"/>
               <a:t>按一下以編輯母片標題樣式</a:t>
             </a:r>
-            <a:endParaRPr lang="zh-TW" altLang="en-US"/>
           </a:p>
         </p:txBody>
       </p:sp>
@@ -2133,38 +2116,37 @@
           <a:p>
             <a:pPr lvl="0"/>
             <a:r>
-              <a:rPr lang="zh-TW" altLang="en-US" smtClean="0"/>
+              <a:rPr lang="zh-TW" altLang="en-US"/>
               <a:t>按一下以編輯母片文字樣式</a:t>
             </a:r>
           </a:p>
           <a:p>
             <a:pPr lvl="1"/>
             <a:r>
-              <a:rPr lang="zh-TW" altLang="en-US" smtClean="0"/>
+              <a:rPr lang="zh-TW" altLang="en-US"/>
               <a:t>第二層</a:t>
             </a:r>
           </a:p>
           <a:p>
             <a:pPr lvl="2"/>
             <a:r>
-              <a:rPr lang="zh-TW" altLang="en-US" smtClean="0"/>
+              <a:rPr lang="zh-TW" altLang="en-US"/>
               <a:t>第三層</a:t>
             </a:r>
           </a:p>
           <a:p>
             <a:pPr lvl="3"/>
             <a:r>
-              <a:rPr lang="zh-TW" altLang="en-US" smtClean="0"/>
+              <a:rPr lang="zh-TW" altLang="en-US"/>
               <a:t>第四層</a:t>
             </a:r>
           </a:p>
           <a:p>
             <a:pPr lvl="4"/>
             <a:r>
-              <a:rPr lang="zh-TW" altLang="en-US" smtClean="0"/>
+              <a:rPr lang="zh-TW" altLang="en-US"/>
               <a:t>第五層</a:t>
             </a:r>
-            <a:endParaRPr lang="zh-TW" altLang="en-US"/>
           </a:p>
         </p:txBody>
       </p:sp>
@@ -2227,7 +2209,7 @@
           <a:p>
             <a:pPr lvl="0"/>
             <a:r>
-              <a:rPr lang="zh-TW" altLang="en-US" smtClean="0"/>
+              <a:rPr lang="zh-TW" altLang="en-US"/>
               <a:t>按一下以編輯母片文字樣式</a:t>
             </a:r>
           </a:p>
@@ -2251,7 +2233,7 @@
             <a:fld id="{F4DC9DE7-1299-458E-9A51-39F41637C414}" type="datetimeFigureOut">
               <a:rPr lang="zh-TW" altLang="en-US" smtClean="0"/>
               <a:pPr/>
-              <a:t>2024/9/8</a:t>
+              <a:t>2026/1/24</a:t>
             </a:fld>
             <a:endParaRPr lang="zh-TW" altLang="en-US"/>
           </a:p>
@@ -2350,10 +2332,9 @@
           </a:lstStyle>
           <a:p>
             <a:r>
-              <a:rPr lang="zh-TW" altLang="en-US" smtClean="0"/>
+              <a:rPr lang="zh-TW" altLang="en-US"/>
               <a:t>按一下以編輯母片標題樣式</a:t>
             </a:r>
-            <a:endParaRPr lang="zh-TW" altLang="en-US"/>
           </a:p>
         </p:txBody>
       </p:sp>
@@ -2415,10 +2396,9 @@
           </a:lstStyle>
           <a:p>
             <a:r>
-              <a:rPr lang="zh-TW" altLang="en-US" smtClean="0"/>
+              <a:rPr lang="zh-TW" altLang="en-US"/>
               <a:t>按一下圖示以新增圖片</a:t>
             </a:r>
-            <a:endParaRPr lang="zh-TW" altLang="en-US"/>
           </a:p>
         </p:txBody>
       </p:sp>
@@ -2481,7 +2461,7 @@
           <a:p>
             <a:pPr lvl="0"/>
             <a:r>
-              <a:rPr lang="zh-TW" altLang="en-US" smtClean="0"/>
+              <a:rPr lang="zh-TW" altLang="en-US"/>
               <a:t>按一下以編輯母片文字樣式</a:t>
             </a:r>
           </a:p>
@@ -2505,7 +2485,7 @@
             <a:fld id="{F4DC9DE7-1299-458E-9A51-39F41637C414}" type="datetimeFigureOut">
               <a:rPr lang="zh-TW" altLang="en-US" smtClean="0"/>
               <a:pPr/>
-              <a:t>2024/9/8</a:t>
+              <a:t>2026/1/24</a:t>
             </a:fld>
             <a:endParaRPr lang="zh-TW" altLang="en-US"/>
           </a:p>
@@ -2615,10 +2595,9 @@
           <a:lstStyle/>
           <a:p>
             <a:r>
-              <a:rPr lang="zh-TW" altLang="en-US" smtClean="0"/>
+              <a:rPr lang="zh-TW" altLang="en-US"/>
               <a:t>按一下以編輯母片標題樣式</a:t>
             </a:r>
-            <a:endParaRPr lang="zh-TW" altLang="en-US"/>
           </a:p>
         </p:txBody>
       </p:sp>
@@ -2649,38 +2628,37 @@
           <a:p>
             <a:pPr lvl="0"/>
             <a:r>
-              <a:rPr lang="zh-TW" altLang="en-US" smtClean="0"/>
+              <a:rPr lang="zh-TW" altLang="en-US"/>
               <a:t>按一下以編輯母片文字樣式</a:t>
             </a:r>
           </a:p>
           <a:p>
             <a:pPr lvl="1"/>
             <a:r>
-              <a:rPr lang="zh-TW" altLang="en-US" smtClean="0"/>
+              <a:rPr lang="zh-TW" altLang="en-US"/>
               <a:t>第二層</a:t>
             </a:r>
           </a:p>
           <a:p>
             <a:pPr lvl="2"/>
             <a:r>
-              <a:rPr lang="zh-TW" altLang="en-US" smtClean="0"/>
+              <a:rPr lang="zh-TW" altLang="en-US"/>
               <a:t>第三層</a:t>
             </a:r>
           </a:p>
           <a:p>
             <a:pPr lvl="3"/>
             <a:r>
-              <a:rPr lang="zh-TW" altLang="en-US" smtClean="0"/>
+              <a:rPr lang="zh-TW" altLang="en-US"/>
               <a:t>第四層</a:t>
             </a:r>
           </a:p>
           <a:p>
             <a:pPr lvl="4"/>
             <a:r>
-              <a:rPr lang="zh-TW" altLang="en-US" smtClean="0"/>
+              <a:rPr lang="zh-TW" altLang="en-US"/>
               <a:t>第五層</a:t>
             </a:r>
-            <a:endParaRPr lang="zh-TW" altLang="en-US"/>
           </a:p>
         </p:txBody>
       </p:sp>
@@ -2720,7 +2698,7 @@
             <a:fld id="{F4DC9DE7-1299-458E-9A51-39F41637C414}" type="datetimeFigureOut">
               <a:rPr lang="zh-TW" altLang="en-US" smtClean="0"/>
               <a:pPr/>
-              <a:t>2024/9/8</a:t>
+              <a:t>2026/1/24</a:t>
             </a:fld>
             <a:endParaRPr lang="zh-TW" altLang="en-US"/>
           </a:p>
@@ -3114,7 +3092,7 @@
           <a:lstStyle/>
           <a:p>
             <a:r>
-              <a:rPr lang="zh-TW" altLang="en-US" sz="5400" b="1" i="1" dirty="0" smtClean="0">
+              <a:rPr lang="zh-TW" altLang="en-US" sz="5400" b="1" i="1" dirty="0">
                 <a:solidFill>
                   <a:srgbClr val="000066"/>
                 </a:solidFill>
@@ -3128,24 +3106,7 @@
                 <a:latin typeface="微軟正黑體" pitchFamily="34" charset="-120"/>
                 <a:ea typeface="微軟正黑體" pitchFamily="34" charset="-120"/>
               </a:rPr>
-              <a:t>我</a:t>
-            </a:r>
-            <a:r>
-              <a:rPr lang="zh-TW" altLang="en-US" sz="5400" b="1" i="1" dirty="0">
-                <a:solidFill>
-                  <a:srgbClr val="000066"/>
-                </a:solidFill>
-                <a:effectLst>
-                  <a:outerShdw blurRad="38100" dist="38100" dir="2700000" algn="tl">
-                    <a:srgbClr val="000000">
-                      <a:alpha val="43137"/>
-                    </a:srgbClr>
-                  </a:outerShdw>
-                </a:effectLst>
-                <a:latin typeface="微軟正黑體" pitchFamily="34" charset="-120"/>
-                <a:ea typeface="微軟正黑體" pitchFamily="34" charset="-120"/>
-              </a:rPr>
-              <a:t>要全心讚美</a:t>
+              <a:t>我要全心讚美</a:t>
             </a:r>
           </a:p>
         </p:txBody>
@@ -3153,7 +3114,7 @@
     </p:spTree>
     <p:extLst>
       <p:ext uri="{BB962C8B-B14F-4D97-AF65-F5344CB8AC3E}">
-        <p14:creationId xmlns:p14="http://schemas.microsoft.com/office/powerpoint/2010/main" xmlns="" val="2184734766"/>
+        <p14:creationId xmlns:p14="http://schemas.microsoft.com/office/powerpoint/2010/main" val="2184734766"/>
       </p:ext>
     </p:extLst>
   </p:cSld>
@@ -3235,49 +3196,29 @@
                 <a:latin typeface="微軟正黑體" pitchFamily="34" charset="-120"/>
                 <a:ea typeface="微軟正黑體" pitchFamily="34" charset="-120"/>
               </a:rPr>
-              <a:t>進</a:t>
-            </a:r>
-            <a:r>
-              <a:rPr lang="zh-TW" altLang="en-US" sz="4800" b="1" dirty="0" smtClean="0">
+              <a:t>進入</a:t>
+            </a:r>
+            <a:r>
+              <a:rPr lang="zh-CN" altLang="en-US" sz="4800" b="1" dirty="0">
                 <a:solidFill>
                   <a:srgbClr val="000066"/>
                 </a:solidFill>
                 <a:latin typeface="微軟正黑體" pitchFamily="34" charset="-120"/>
                 <a:ea typeface="微軟正黑體" pitchFamily="34" charset="-120"/>
               </a:rPr>
-              <a:t>入</a:t>
-            </a:r>
-            <a:r>
-              <a:rPr lang="zh-CN" altLang="en-US" sz="4800" b="1" dirty="0">
+              <a:t>祢</a:t>
+            </a:r>
+            <a:r>
+              <a:rPr lang="zh-TW" altLang="en-US" sz="4800" b="1" dirty="0">
                 <a:solidFill>
                   <a:srgbClr val="000066"/>
                 </a:solidFill>
                 <a:latin typeface="微軟正黑體" pitchFamily="34" charset="-120"/>
                 <a:ea typeface="微軟正黑體" pitchFamily="34" charset="-120"/>
               </a:rPr>
-              <a:t>祢</a:t>
-            </a:r>
-            <a:r>
-              <a:rPr lang="zh-TW" altLang="en-US" sz="4800" b="1" dirty="0" smtClean="0">
-                <a:solidFill>
-                  <a:srgbClr val="000066"/>
-                </a:solidFill>
-                <a:latin typeface="微軟正黑體" pitchFamily="34" charset="-120"/>
-                <a:ea typeface="微軟正黑體" pitchFamily="34" charset="-120"/>
-              </a:rPr>
-              <a:t>的</a:t>
-            </a:r>
-            <a:r>
-              <a:rPr lang="zh-TW" altLang="en-US" sz="4800" b="1" dirty="0">
-                <a:solidFill>
-                  <a:srgbClr val="000066"/>
-                </a:solidFill>
-                <a:latin typeface="微軟正黑體" pitchFamily="34" charset="-120"/>
-                <a:ea typeface="微軟正黑體" pitchFamily="34" charset="-120"/>
-              </a:rPr>
-              <a:t>院</a:t>
-            </a:r>
-            <a:endParaRPr lang="en-US" altLang="zh-TW" sz="4800" b="1" dirty="0" smtClean="0">
+              <a:t>的院</a:t>
+            </a:r>
+            <a:endParaRPr lang="en-US" altLang="zh-TW" sz="4800" b="1" dirty="0">
               <a:solidFill>
                 <a:srgbClr val="000066"/>
               </a:solidFill>
@@ -3311,7 +3252,7 @@
           <a:p>
             <a:pPr algn="ctr"/>
             <a:r>
-              <a:rPr lang="en-US" sz="2400" b="1" dirty="0" smtClean="0">
+              <a:rPr lang="en-US" sz="2400" b="1" dirty="0">
                 <a:solidFill>
                   <a:srgbClr val="000066"/>
                 </a:solidFill>
@@ -3321,17 +3262,17 @@
               <a:t>( </a:t>
             </a:r>
             <a:r>
-              <a:rPr lang="zh-CN" altLang="en-US" sz="2400" b="1" dirty="0" smtClean="0">
+              <a:rPr lang="zh-CN" altLang="en-US" sz="2400" b="1" dirty="0">
                 <a:solidFill>
                   <a:srgbClr val="000066"/>
                 </a:solidFill>
                 <a:latin typeface="Microsoft JhengHei" panose="020B0604030504040204" pitchFamily="34" charset="-120"/>
                 <a:ea typeface="Microsoft JhengHei" panose="020B0604030504040204" pitchFamily="34" charset="-120"/>
               </a:rPr>
-              <a:t>正</a:t>
-            </a:r>
-            <a:r>
-              <a:rPr lang="en-US" sz="2400" b="1" dirty="0" smtClean="0">
+              <a:t>正歌</a:t>
+            </a:r>
+            <a:r>
+              <a:rPr lang="en-US" sz="2400" b="1" dirty="0">
                 <a:solidFill>
                   <a:srgbClr val="000066"/>
                 </a:solidFill>
@@ -3352,7 +3293,7 @@
     </p:spTree>
     <p:extLst>
       <p:ext uri="{BB962C8B-B14F-4D97-AF65-F5344CB8AC3E}">
-        <p14:creationId xmlns:p14="http://schemas.microsoft.com/office/powerpoint/2010/main" xmlns="" val="1898455939"/>
+        <p14:creationId xmlns:p14="http://schemas.microsoft.com/office/powerpoint/2010/main" val="1898455939"/>
       </p:ext>
     </p:extLst>
   </p:cSld>
@@ -3483,7 +3424,7 @@
           <a:p>
             <a:pPr algn="ctr"/>
             <a:r>
-              <a:rPr lang="en-US" sz="2400" b="1" dirty="0" smtClean="0">
+              <a:rPr lang="en-US" sz="2400" b="1" dirty="0">
                 <a:solidFill>
                   <a:srgbClr val="000066"/>
                 </a:solidFill>
@@ -3493,17 +3434,17 @@
               <a:t>( </a:t>
             </a:r>
             <a:r>
-              <a:rPr lang="zh-CN" altLang="en-US" sz="2400" b="1" dirty="0" smtClean="0">
+              <a:rPr lang="zh-CN" altLang="en-US" sz="2400" b="1" dirty="0">
                 <a:solidFill>
                   <a:srgbClr val="000066"/>
                 </a:solidFill>
                 <a:latin typeface="Microsoft JhengHei" panose="020B0604030504040204" pitchFamily="34" charset="-120"/>
                 <a:ea typeface="Microsoft JhengHei" panose="020B0604030504040204" pitchFamily="34" charset="-120"/>
               </a:rPr>
-              <a:t>正</a:t>
-            </a:r>
-            <a:r>
-              <a:rPr lang="en-US" sz="2400" b="1" dirty="0" smtClean="0">
+              <a:t>正歌</a:t>
+            </a:r>
+            <a:r>
+              <a:rPr lang="en-US" sz="2400" b="1" dirty="0">
                 <a:solidFill>
                   <a:srgbClr val="000066"/>
                 </a:solidFill>
@@ -3516,7 +3457,6 @@
               <a:solidFill>
                 <a:srgbClr val="000066"/>
               </a:solidFill>
-              <a:latin typeface="Microsoft JhengHei" panose="020B0604030504040204" pitchFamily="34" charset="-120"/>
               <a:ea typeface="Microsoft JhengHei" panose="020B0604030504040204" pitchFamily="34" charset="-120"/>
             </a:endParaRPr>
           </a:p>
@@ -3525,7 +3465,7 @@
     </p:spTree>
     <p:extLst>
       <p:ext uri="{BB962C8B-B14F-4D97-AF65-F5344CB8AC3E}">
-        <p14:creationId xmlns:p14="http://schemas.microsoft.com/office/powerpoint/2010/main" xmlns="" val="625573592"/>
+        <p14:creationId xmlns:p14="http://schemas.microsoft.com/office/powerpoint/2010/main" val="625573592"/>
       </p:ext>
     </p:extLst>
   </p:cSld>
@@ -3578,7 +3518,7 @@
               <a:buNone/>
             </a:pPr>
             <a:r>
-              <a:rPr lang="zh-TW" altLang="en-US" sz="4800" b="1" dirty="0" smtClean="0">
+              <a:rPr lang="zh-TW" altLang="en-US" sz="4800" b="1" dirty="0">
                 <a:solidFill>
                   <a:srgbClr val="000066"/>
                 </a:solidFill>
@@ -3598,24 +3538,14 @@
               <a:t>祢</a:t>
             </a:r>
             <a:r>
-              <a:rPr lang="zh-TW" altLang="en-US" sz="4800" b="1" dirty="0" smtClean="0">
+              <a:rPr lang="zh-TW" altLang="en-US" sz="4800" b="1" dirty="0">
                 <a:solidFill>
                   <a:srgbClr val="000066"/>
                 </a:solidFill>
                 <a:latin typeface="微軟正黑體" pitchFamily="34" charset="-120"/>
                 <a:ea typeface="微軟正黑體" pitchFamily="34" charset="-120"/>
               </a:rPr>
-              <a:t>裡</a:t>
-            </a:r>
-            <a:r>
-              <a:rPr lang="zh-TW" altLang="en-US" sz="4800" b="1" dirty="0">
-                <a:solidFill>
-                  <a:srgbClr val="000066"/>
-                </a:solidFill>
-                <a:latin typeface="微軟正黑體" pitchFamily="34" charset="-120"/>
-                <a:ea typeface="微軟正黑體" pitchFamily="34" charset="-120"/>
-              </a:rPr>
-              <a:t>面  一無罣慮</a:t>
+              <a:t>裡面  一無罣慮</a:t>
             </a:r>
             <a:r>
               <a:rPr lang="en-US" altLang="zh-TW" sz="4800" b="1" dirty="0">
@@ -3669,7 +3599,7 @@
           <a:p>
             <a:pPr algn="ctr"/>
             <a:r>
-              <a:rPr lang="en-US" sz="2400" b="1" dirty="0" smtClean="0">
+              <a:rPr lang="en-US" sz="2400" b="1" dirty="0">
                 <a:solidFill>
                   <a:srgbClr val="000066"/>
                 </a:solidFill>
@@ -3679,17 +3609,17 @@
               <a:t>( </a:t>
             </a:r>
             <a:r>
-              <a:rPr lang="zh-CN" altLang="en-US" sz="2400" b="1" dirty="0" smtClean="0">
+              <a:rPr lang="zh-CN" altLang="en-US" sz="2400" b="1" dirty="0">
                 <a:solidFill>
                   <a:srgbClr val="000066"/>
                 </a:solidFill>
                 <a:latin typeface="Microsoft JhengHei" panose="020B0604030504040204" pitchFamily="34" charset="-120"/>
                 <a:ea typeface="Microsoft JhengHei" panose="020B0604030504040204" pitchFamily="34" charset="-120"/>
               </a:rPr>
-              <a:t>正</a:t>
-            </a:r>
-            <a:r>
-              <a:rPr lang="en-US" sz="2400" b="1" dirty="0" smtClean="0">
+              <a:t>正歌</a:t>
+            </a:r>
+            <a:r>
+              <a:rPr lang="en-US" sz="2400" b="1" dirty="0">
                 <a:solidFill>
                   <a:srgbClr val="000066"/>
                 </a:solidFill>
@@ -3702,7 +3632,6 @@
               <a:solidFill>
                 <a:srgbClr val="000066"/>
               </a:solidFill>
-              <a:latin typeface="Microsoft JhengHei" panose="020B0604030504040204" pitchFamily="34" charset="-120"/>
               <a:ea typeface="Microsoft JhengHei" panose="020B0604030504040204" pitchFamily="34" charset="-120"/>
             </a:endParaRPr>
           </a:p>
@@ -3711,7 +3640,7 @@
     </p:spTree>
     <p:extLst>
       <p:ext uri="{BB962C8B-B14F-4D97-AF65-F5344CB8AC3E}">
-        <p14:creationId xmlns:p14="http://schemas.microsoft.com/office/powerpoint/2010/main" xmlns="" val="2179620692"/>
+        <p14:creationId xmlns:p14="http://schemas.microsoft.com/office/powerpoint/2010/main" val="2179620692"/>
       </p:ext>
     </p:extLst>
   </p:cSld>
@@ -3793,17 +3722,7 @@
                 <a:latin typeface="微軟正黑體" pitchFamily="34" charset="-120"/>
                 <a:ea typeface="微軟正黑體" pitchFamily="34" charset="-120"/>
               </a:rPr>
-              <a:t>盼望在</a:t>
-            </a:r>
-            <a:r>
-              <a:rPr lang="zh-TW" altLang="en-US" sz="4800" b="1" dirty="0" smtClean="0">
-                <a:solidFill>
-                  <a:srgbClr val="000066"/>
-                </a:solidFill>
-                <a:latin typeface="微軟正黑體" pitchFamily="34" charset="-120"/>
-                <a:ea typeface="微軟正黑體" pitchFamily="34" charset="-120"/>
-              </a:rPr>
-              <a:t>於</a:t>
+              <a:t>盼望在於</a:t>
             </a:r>
             <a:r>
               <a:rPr lang="zh-CN" altLang="en-US" sz="4800" b="1" dirty="0">
@@ -3849,7 +3768,7 @@
           <a:p>
             <a:pPr algn="ctr"/>
             <a:r>
-              <a:rPr lang="en-US" sz="2400" b="1" dirty="0" smtClean="0">
+              <a:rPr lang="en-US" sz="2400" b="1" dirty="0">
                 <a:solidFill>
                   <a:srgbClr val="000066"/>
                 </a:solidFill>
@@ -3859,17 +3778,17 @@
               <a:t>( </a:t>
             </a:r>
             <a:r>
-              <a:rPr lang="zh-CN" altLang="en-US" sz="2400" b="1" dirty="0" smtClean="0">
+              <a:rPr lang="zh-CN" altLang="en-US" sz="2400" b="1" dirty="0">
                 <a:solidFill>
                   <a:srgbClr val="000066"/>
                 </a:solidFill>
                 <a:latin typeface="Microsoft JhengHei" panose="020B0604030504040204" pitchFamily="34" charset="-120"/>
                 <a:ea typeface="Microsoft JhengHei" panose="020B0604030504040204" pitchFamily="34" charset="-120"/>
               </a:rPr>
-              <a:t>正</a:t>
-            </a:r>
-            <a:r>
-              <a:rPr lang="en-US" sz="2400" b="1" dirty="0" smtClean="0">
+              <a:t>正歌</a:t>
+            </a:r>
+            <a:r>
+              <a:rPr lang="en-US" sz="2400" b="1" dirty="0">
                 <a:solidFill>
                   <a:srgbClr val="000066"/>
                 </a:solidFill>
@@ -3882,7 +3801,6 @@
               <a:solidFill>
                 <a:srgbClr val="000066"/>
               </a:solidFill>
-              <a:latin typeface="Microsoft JhengHei" panose="020B0604030504040204" pitchFamily="34" charset="-120"/>
               <a:ea typeface="Microsoft JhengHei" panose="020B0604030504040204" pitchFamily="34" charset="-120"/>
             </a:endParaRPr>
           </a:p>
@@ -3891,7 +3809,7 @@
     </p:spTree>
     <p:extLst>
       <p:ext uri="{BB962C8B-B14F-4D97-AF65-F5344CB8AC3E}">
-        <p14:creationId xmlns:p14="http://schemas.microsoft.com/office/powerpoint/2010/main" xmlns="" val="2327894863"/>
+        <p14:creationId xmlns:p14="http://schemas.microsoft.com/office/powerpoint/2010/main" val="2327894863"/>
       </p:ext>
     </p:extLst>
   </p:cSld>
@@ -3951,17 +3869,17 @@
                 <a:latin typeface="微軟正黑體" pitchFamily="34" charset="-120"/>
                 <a:ea typeface="微軟正黑體" pitchFamily="34" charset="-120"/>
               </a:rPr>
-              <a:t>我要全心讚美  </a:t>
-            </a:r>
-            <a:r>
-              <a:rPr lang="zh-TW" altLang="en-US" sz="4800" b="1" dirty="0" smtClean="0">
+              <a:t>我要全心讚美  跳舞頌揚</a:t>
+            </a:r>
+            <a:r>
+              <a:rPr lang="zh-CN" altLang="en-US" sz="4800" b="1" dirty="0">
                 <a:solidFill>
                   <a:srgbClr val="000066"/>
                 </a:solidFill>
                 <a:latin typeface="微軟正黑體" pitchFamily="34" charset="-120"/>
                 <a:ea typeface="微軟正黑體" pitchFamily="34" charset="-120"/>
               </a:rPr>
-              <a:t>跳</a:t>
+              <a:t>祢</a:t>
             </a:r>
             <a:r>
               <a:rPr lang="zh-TW" altLang="en-US" sz="4800" b="1" dirty="0">
@@ -3971,39 +3889,9 @@
                 <a:latin typeface="微軟正黑體" pitchFamily="34" charset="-120"/>
                 <a:ea typeface="微軟正黑體" pitchFamily="34" charset="-120"/>
               </a:rPr>
-              <a:t>舞頌</a:t>
-            </a:r>
-            <a:r>
-              <a:rPr lang="zh-TW" altLang="en-US" sz="4800" b="1" dirty="0" smtClean="0">
-                <a:solidFill>
-                  <a:srgbClr val="000066"/>
-                </a:solidFill>
-                <a:latin typeface="微軟正黑體" pitchFamily="34" charset="-120"/>
-                <a:ea typeface="微軟正黑體" pitchFamily="34" charset="-120"/>
-              </a:rPr>
-              <a:t>揚</a:t>
-            </a:r>
-            <a:r>
-              <a:rPr lang="zh-CN" altLang="en-US" sz="4800" b="1" dirty="0">
-                <a:solidFill>
-                  <a:srgbClr val="000066"/>
-                </a:solidFill>
-                <a:latin typeface="微軟正黑體" pitchFamily="34" charset="-120"/>
-                <a:ea typeface="微軟正黑體" pitchFamily="34" charset="-120"/>
-              </a:rPr>
-              <a:t>祢</a:t>
-            </a:r>
-            <a:r>
-              <a:rPr lang="zh-TW" altLang="en-US" sz="4800" b="1" dirty="0" smtClean="0">
-                <a:solidFill>
-                  <a:srgbClr val="000066"/>
-                </a:solidFill>
-                <a:latin typeface="微軟正黑體" pitchFamily="34" charset="-120"/>
-                <a:ea typeface="微軟正黑體" pitchFamily="34" charset="-120"/>
-              </a:rPr>
               <a:t>名</a:t>
             </a:r>
-            <a:endParaRPr lang="en-US" altLang="zh-TW" sz="4800" b="1" dirty="0" smtClean="0">
+            <a:endParaRPr lang="en-US" altLang="zh-TW" sz="4800" b="1" dirty="0">
               <a:solidFill>
                 <a:srgbClr val="000066"/>
               </a:solidFill>
@@ -4016,7 +3904,7 @@
               <a:buNone/>
             </a:pPr>
             <a:r>
-              <a:rPr lang="zh-TW" altLang="en-US" sz="4800" b="1" dirty="0" smtClean="0">
+              <a:rPr lang="zh-TW" altLang="en-US" sz="4800" b="1" dirty="0">
                 <a:solidFill>
                   <a:srgbClr val="000066"/>
                 </a:solidFill>
@@ -4036,54 +3924,34 @@
               <a:t>祢</a:t>
             </a:r>
             <a:r>
-              <a:rPr lang="zh-TW" altLang="en-US" sz="4800" b="1" dirty="0" smtClean="0">
+              <a:rPr lang="zh-TW" altLang="en-US" sz="4800" b="1" dirty="0">
                 <a:solidFill>
                   <a:srgbClr val="000066"/>
                 </a:solidFill>
                 <a:latin typeface="微軟正黑體" pitchFamily="34" charset="-120"/>
                 <a:ea typeface="微軟正黑體" pitchFamily="34" charset="-120"/>
               </a:rPr>
-              <a:t>殿</a:t>
-            </a:r>
-            <a:r>
-              <a:rPr lang="zh-TW" altLang="en-US" sz="4800" b="1" dirty="0">
+              <a:t>殿中一日勝過</a:t>
+            </a:r>
+            <a:r>
+              <a:rPr lang="en-US" altLang="zh-TW" sz="4800" b="1" dirty="0">
                 <a:solidFill>
                   <a:srgbClr val="000066"/>
                 </a:solidFill>
                 <a:latin typeface="微軟正黑體" pitchFamily="34" charset="-120"/>
                 <a:ea typeface="微軟正黑體" pitchFamily="34" charset="-120"/>
               </a:rPr>
-              <a:t>中一日勝過</a:t>
-            </a:r>
-            <a:r>
-              <a:rPr lang="en-US" altLang="zh-TW" sz="4800" b="1" dirty="0">
+              <a:t>  </a:t>
+            </a:r>
+            <a:r>
+              <a:rPr lang="zh-TW" altLang="en-US" sz="4800" b="1" dirty="0">
                 <a:solidFill>
                   <a:srgbClr val="000066"/>
                 </a:solidFill>
                 <a:latin typeface="微軟正黑體" pitchFamily="34" charset="-120"/>
                 <a:ea typeface="微軟正黑體" pitchFamily="34" charset="-120"/>
               </a:rPr>
-              <a:t>  </a:t>
-            </a:r>
-            <a:r>
-              <a:rPr lang="zh-TW" altLang="en-US" sz="4800" b="1" dirty="0">
-                <a:solidFill>
-                  <a:srgbClr val="000066"/>
-                </a:solidFill>
-                <a:latin typeface="微軟正黑體" pitchFamily="34" charset="-120"/>
-                <a:ea typeface="微軟正黑體" pitchFamily="34" charset="-120"/>
-              </a:rPr>
-              <a:t>在世上千</a:t>
-            </a:r>
-            <a:r>
-              <a:rPr lang="zh-TW" altLang="en-US" sz="4800" b="1" dirty="0" smtClean="0">
-                <a:solidFill>
-                  <a:srgbClr val="000066"/>
-                </a:solidFill>
-                <a:latin typeface="微軟正黑體" pitchFamily="34" charset="-120"/>
-                <a:ea typeface="微軟正黑體" pitchFamily="34" charset="-120"/>
-              </a:rPr>
-              <a:t>日</a:t>
+              <a:t>在世上千日</a:t>
             </a:r>
             <a:endParaRPr lang="en-US" altLang="zh-TW" sz="4800" b="1" dirty="0">
               <a:solidFill>
@@ -4119,7 +3987,7 @@
           <a:p>
             <a:pPr algn="ctr"/>
             <a:r>
-              <a:rPr lang="en-US" sz="2400" b="1" dirty="0" smtClean="0">
+              <a:rPr lang="en-US" sz="2400" b="1" dirty="0">
                 <a:solidFill>
                   <a:srgbClr val="000066"/>
                 </a:solidFill>
@@ -4129,17 +3997,17 @@
               <a:t>( </a:t>
             </a:r>
             <a:r>
-              <a:rPr lang="zh-CN" altLang="en-US" sz="2400" b="1" dirty="0" smtClean="0">
+              <a:rPr lang="zh-CN" altLang="en-US" sz="2400" b="1" dirty="0">
                 <a:solidFill>
                   <a:srgbClr val="000066"/>
                 </a:solidFill>
                 <a:latin typeface="Microsoft JhengHei" panose="020B0604030504040204" pitchFamily="34" charset="-120"/>
                 <a:ea typeface="Microsoft JhengHei" panose="020B0604030504040204" pitchFamily="34" charset="-120"/>
               </a:rPr>
-              <a:t>副</a:t>
-            </a:r>
-            <a:r>
-              <a:rPr lang="en-US" sz="2400" b="1" dirty="0" smtClean="0">
+              <a:t>副歌</a:t>
+            </a:r>
+            <a:r>
+              <a:rPr lang="en-US" sz="2400" b="1" dirty="0">
                 <a:solidFill>
                   <a:srgbClr val="000066"/>
                 </a:solidFill>
@@ -4161,7 +4029,7 @@
     </p:spTree>
     <p:extLst>
       <p:ext uri="{BB962C8B-B14F-4D97-AF65-F5344CB8AC3E}">
-        <p14:creationId xmlns:p14="http://schemas.microsoft.com/office/powerpoint/2010/main" xmlns="" val="3225736631"/>
+        <p14:creationId xmlns:p14="http://schemas.microsoft.com/office/powerpoint/2010/main" val="3225736631"/>
       </p:ext>
     </p:extLst>
   </p:cSld>
@@ -4282,7 +4150,7 @@
           <a:p>
             <a:pPr algn="ctr"/>
             <a:r>
-              <a:rPr lang="en-US" sz="2400" b="1" dirty="0" smtClean="0">
+              <a:rPr lang="en-US" sz="2400" b="1" dirty="0">
                 <a:solidFill>
                   <a:srgbClr val="000066"/>
                 </a:solidFill>
@@ -4292,17 +4160,17 @@
               <a:t>( </a:t>
             </a:r>
             <a:r>
-              <a:rPr lang="zh-CN" altLang="en-US" sz="2400" b="1" dirty="0" smtClean="0">
+              <a:rPr lang="zh-CN" altLang="en-US" sz="2400" b="1" dirty="0">
                 <a:solidFill>
                   <a:srgbClr val="000066"/>
                 </a:solidFill>
                 <a:latin typeface="Microsoft JhengHei" panose="020B0604030504040204" pitchFamily="34" charset="-120"/>
                 <a:ea typeface="Microsoft JhengHei" panose="020B0604030504040204" pitchFamily="34" charset="-120"/>
               </a:rPr>
-              <a:t>副</a:t>
-            </a:r>
-            <a:r>
-              <a:rPr lang="en-US" sz="2400" b="1" dirty="0" smtClean="0">
+              <a:t>副歌</a:t>
+            </a:r>
+            <a:r>
+              <a:rPr lang="en-US" sz="2400" b="1" dirty="0">
                 <a:solidFill>
                   <a:srgbClr val="000066"/>
                 </a:solidFill>
@@ -4324,7 +4192,7 @@
     </p:spTree>
     <p:extLst>
       <p:ext uri="{BB962C8B-B14F-4D97-AF65-F5344CB8AC3E}">
-        <p14:creationId xmlns:p14="http://schemas.microsoft.com/office/powerpoint/2010/main" xmlns="" val="1730094437"/>
+        <p14:creationId xmlns:p14="http://schemas.microsoft.com/office/powerpoint/2010/main" val="1730094437"/>
       </p:ext>
     </p:extLst>
   </p:cSld>
@@ -4413,7 +4281,7 @@
           <a:p>
             <a:pPr algn="ctr"/>
             <a:r>
-              <a:rPr lang="en-US" sz="2400" b="1" dirty="0" smtClean="0">
+              <a:rPr lang="en-US" sz="2400" b="1" dirty="0">
                 <a:solidFill>
                   <a:srgbClr val="000066"/>
                 </a:solidFill>
@@ -4423,17 +4291,17 @@
               <a:t>( </a:t>
             </a:r>
             <a:r>
-              <a:rPr lang="zh-CN" altLang="en-US" sz="2400" b="1" dirty="0" smtClean="0">
+              <a:rPr lang="zh-CN" altLang="en-US" sz="2400" b="1" dirty="0">
                 <a:solidFill>
                   <a:srgbClr val="000066"/>
                 </a:solidFill>
                 <a:latin typeface="Microsoft JhengHei" panose="020B0604030504040204" pitchFamily="34" charset="-120"/>
                 <a:ea typeface="Microsoft JhengHei" panose="020B0604030504040204" pitchFamily="34" charset="-120"/>
               </a:rPr>
-              <a:t>副</a:t>
-            </a:r>
-            <a:r>
-              <a:rPr lang="en-US" sz="2400" b="1" dirty="0" smtClean="0">
+              <a:t>副歌</a:t>
+            </a:r>
+            <a:r>
+              <a:rPr lang="en-US" sz="2400" b="1" dirty="0">
                 <a:solidFill>
                   <a:srgbClr val="000066"/>
                 </a:solidFill>
@@ -4455,7 +4323,7 @@
     </p:spTree>
     <p:extLst>
       <p:ext uri="{BB962C8B-B14F-4D97-AF65-F5344CB8AC3E}">
-        <p14:creationId xmlns:p14="http://schemas.microsoft.com/office/powerpoint/2010/main" xmlns="" val="640735095"/>
+        <p14:creationId xmlns:p14="http://schemas.microsoft.com/office/powerpoint/2010/main" val="640735095"/>
       </p:ext>
     </p:extLst>
   </p:cSld>
